--- a/reference_content/Slides/TimeSeries.pptx
+++ b/reference_content/Slides/TimeSeries.pptx
@@ -487,7 +487,7 @@
           <a:p>
             <a:fld id="{7CAF7FD4-E345-3B4F-B408-1EAACE559263}" type="datetimeFigureOut">
               <a:rPr lang="en-US" smtClean="0"/>
-              <a:t>3/31/25</a:t>
+              <a:t>3/3/26</a:t>
             </a:fld>
             <a:endParaRPr lang="en-US"/>
           </a:p>
@@ -698,7 +698,7 @@
           <a:p>
             <a:fld id="{7CAF7FD4-E345-3B4F-B408-1EAACE559263}" type="datetimeFigureOut">
               <a:rPr lang="en-US" smtClean="0"/>
-              <a:t>3/31/25</a:t>
+              <a:t>3/3/26</a:t>
             </a:fld>
             <a:endParaRPr lang="en-US"/>
           </a:p>
@@ -913,7 +913,7 @@
           <a:p>
             <a:fld id="{7CAF7FD4-E345-3B4F-B408-1EAACE559263}" type="datetimeFigureOut">
               <a:rPr lang="en-US" smtClean="0"/>
-              <a:t>3/31/25</a:t>
+              <a:t>3/3/26</a:t>
             </a:fld>
             <a:endParaRPr lang="en-US"/>
           </a:p>
@@ -1114,7 +1114,7 @@
           <a:p>
             <a:fld id="{7CAF7FD4-E345-3B4F-B408-1EAACE559263}" type="datetimeFigureOut">
               <a:rPr lang="en-US" smtClean="0"/>
-              <a:t>3/31/25</a:t>
+              <a:t>3/3/26</a:t>
             </a:fld>
             <a:endParaRPr lang="en-US"/>
           </a:p>
@@ -1393,7 +1393,7 @@
           <a:p>
             <a:fld id="{7CAF7FD4-E345-3B4F-B408-1EAACE559263}" type="datetimeFigureOut">
               <a:rPr lang="en-US" smtClean="0"/>
-              <a:t>3/31/25</a:t>
+              <a:t>3/3/26</a:t>
             </a:fld>
             <a:endParaRPr lang="en-US"/>
           </a:p>
@@ -1661,7 +1661,7 @@
           <a:p>
             <a:fld id="{7CAF7FD4-E345-3B4F-B408-1EAACE559263}" type="datetimeFigureOut">
               <a:rPr lang="en-US" smtClean="0"/>
-              <a:t>3/31/25</a:t>
+              <a:t>3/3/26</a:t>
             </a:fld>
             <a:endParaRPr lang="en-US"/>
           </a:p>
@@ -2077,7 +2077,7 @@
           <a:p>
             <a:fld id="{7CAF7FD4-E345-3B4F-B408-1EAACE559263}" type="datetimeFigureOut">
               <a:rPr lang="en-US" smtClean="0"/>
-              <a:t>3/31/25</a:t>
+              <a:t>3/3/26</a:t>
             </a:fld>
             <a:endParaRPr lang="en-US"/>
           </a:p>
@@ -2226,7 +2226,7 @@
           <a:p>
             <a:fld id="{7CAF7FD4-E345-3B4F-B408-1EAACE559263}" type="datetimeFigureOut">
               <a:rPr lang="en-US" smtClean="0"/>
-              <a:t>3/31/25</a:t>
+              <a:t>3/3/26</a:t>
             </a:fld>
             <a:endParaRPr lang="en-US"/>
           </a:p>
@@ -2352,7 +2352,7 @@
           <a:p>
             <a:fld id="{7CAF7FD4-E345-3B4F-B408-1EAACE559263}" type="datetimeFigureOut">
               <a:rPr lang="en-US" smtClean="0"/>
-              <a:t>3/31/25</a:t>
+              <a:t>3/3/26</a:t>
             </a:fld>
             <a:endParaRPr lang="en-US"/>
           </a:p>
@@ -2603,7 +2603,7 @@
           <a:p>
             <a:fld id="{7CAF7FD4-E345-3B4F-B408-1EAACE559263}" type="datetimeFigureOut">
               <a:rPr lang="en-US" smtClean="0"/>
-              <a:t>3/31/25</a:t>
+              <a:t>3/3/26</a:t>
             </a:fld>
             <a:endParaRPr lang="en-US"/>
           </a:p>
@@ -3048,7 +3048,7 @@
           <a:p>
             <a:fld id="{7CAF7FD4-E345-3B4F-B408-1EAACE559263}" type="datetimeFigureOut">
               <a:rPr lang="en-US" smtClean="0"/>
-              <a:t>3/31/25</a:t>
+              <a:t>3/3/26</a:t>
             </a:fld>
             <a:endParaRPr lang="en-US"/>
           </a:p>
@@ -3215,6 +3215,13 @@
             <a:schemeClr val="lt1"/>
           </a:fontRef>
         </p:style>
+        <p:txBody>
+          <a:bodyPr/>
+          <a:lstStyle/>
+          <a:p>
+            <a:endParaRPr lang="en-US"/>
+          </a:p>
+        </p:txBody>
       </p:sp>
       <p:pic>
         <p:nvPicPr>
@@ -3375,7 +3382,7 @@
           <a:p>
             <a:fld id="{7CAF7FD4-E345-3B4F-B408-1EAACE559263}" type="datetimeFigureOut">
               <a:rPr lang="en-US" smtClean="0"/>
-              <a:t>3/31/25</a:t>
+              <a:t>3/3/26</a:t>
             </a:fld>
             <a:endParaRPr lang="en-US"/>
           </a:p>
@@ -3913,36 +3920,9 @@
         </p:spPr>
         <p:txBody>
           <a:bodyPr>
-            <a:normAutofit lnSpcReduction="10000"/>
+            <a:normAutofit/>
           </a:bodyPr>
           <a:lstStyle/>
-          <a:p>
-            <a:r>
-              <a:rPr lang="en-US" dirty="0"/>
-              <a:t>Cancelled assignment 3:</a:t>
-            </a:r>
-          </a:p>
-          <a:p>
-            <a:pPr lvl="1"/>
-            <a:r>
-              <a:rPr lang="en-US" dirty="0"/>
-              <a:t>Some people did it, which wasn’t my intent. </a:t>
-            </a:r>
-          </a:p>
-          <a:p>
-            <a:pPr lvl="1"/>
-            <a:r>
-              <a:rPr lang="en-US" dirty="0"/>
-              <a:t>If you want to hand it in, I’ll take ¾ for the scores to calculate the assignment mark bucket. </a:t>
-            </a:r>
-          </a:p>
-          <a:p>
-            <a:pPr lvl="1"/>
-            <a:r>
-              <a:rPr lang="en-US" dirty="0"/>
-              <a:t>It isn’t something that you need, explicitly, to know deeply for the other parts. </a:t>
-            </a:r>
-          </a:p>
           <a:p>
             <a:r>
               <a:rPr lang="en-US" dirty="0"/>

--- a/reference_content/Slides/TimeSeries.pptx
+++ b/reference_content/Slides/TimeSeries.pptx
@@ -20,32 +20,33 @@
     <p:sldId id="294" r:id="rId14"/>
     <p:sldId id="262" r:id="rId15"/>
     <p:sldId id="284" r:id="rId16"/>
-    <p:sldId id="257" r:id="rId17"/>
-    <p:sldId id="290" r:id="rId18"/>
-    <p:sldId id="259" r:id="rId19"/>
-    <p:sldId id="263" r:id="rId20"/>
-    <p:sldId id="282" r:id="rId21"/>
-    <p:sldId id="283" r:id="rId22"/>
-    <p:sldId id="291" r:id="rId23"/>
-    <p:sldId id="292" r:id="rId24"/>
-    <p:sldId id="293" r:id="rId25"/>
-    <p:sldId id="265" r:id="rId26"/>
-    <p:sldId id="266" r:id="rId27"/>
-    <p:sldId id="264" r:id="rId28"/>
-    <p:sldId id="260" r:id="rId29"/>
-    <p:sldId id="295" r:id="rId30"/>
-    <p:sldId id="276" r:id="rId31"/>
-    <p:sldId id="277" r:id="rId32"/>
+    <p:sldId id="298" r:id="rId17"/>
+    <p:sldId id="257" r:id="rId18"/>
+    <p:sldId id="290" r:id="rId19"/>
+    <p:sldId id="259" r:id="rId20"/>
+    <p:sldId id="263" r:id="rId21"/>
+    <p:sldId id="282" r:id="rId22"/>
+    <p:sldId id="283" r:id="rId23"/>
+    <p:sldId id="291" r:id="rId24"/>
+    <p:sldId id="292" r:id="rId25"/>
+    <p:sldId id="293" r:id="rId26"/>
+    <p:sldId id="265" r:id="rId27"/>
+    <p:sldId id="266" r:id="rId28"/>
+    <p:sldId id="264" r:id="rId29"/>
+    <p:sldId id="260" r:id="rId30"/>
+    <p:sldId id="295" r:id="rId31"/>
+    <p:sldId id="276" r:id="rId32"/>
     <p:sldId id="278" r:id="rId33"/>
-    <p:sldId id="273" r:id="rId34"/>
-    <p:sldId id="274" r:id="rId35"/>
-    <p:sldId id="267" r:id="rId36"/>
-    <p:sldId id="285" r:id="rId37"/>
-    <p:sldId id="268" r:id="rId38"/>
-    <p:sldId id="287" r:id="rId39"/>
-    <p:sldId id="275" r:id="rId40"/>
-    <p:sldId id="279" r:id="rId41"/>
-    <p:sldId id="269" r:id="rId42"/>
+    <p:sldId id="277" r:id="rId34"/>
+    <p:sldId id="273" r:id="rId35"/>
+    <p:sldId id="274" r:id="rId36"/>
+    <p:sldId id="267" r:id="rId37"/>
+    <p:sldId id="285" r:id="rId38"/>
+    <p:sldId id="268" r:id="rId39"/>
+    <p:sldId id="287" r:id="rId40"/>
+    <p:sldId id="275" r:id="rId41"/>
+    <p:sldId id="279" r:id="rId42"/>
+    <p:sldId id="269" r:id="rId43"/>
   </p:sldIdLst>
   <p:sldSz cx="12192000" cy="6858000"/>
   <p:notesSz cx="6858000" cy="9144000"/>
@@ -487,7 +488,7 @@
           <a:p>
             <a:fld id="{7CAF7FD4-E345-3B4F-B408-1EAACE559263}" type="datetimeFigureOut">
               <a:rPr lang="en-US" smtClean="0"/>
-              <a:t>3/3/26</a:t>
+              <a:t>3/31/26</a:t>
             </a:fld>
             <a:endParaRPr lang="en-US"/>
           </a:p>
@@ -698,7 +699,7 @@
           <a:p>
             <a:fld id="{7CAF7FD4-E345-3B4F-B408-1EAACE559263}" type="datetimeFigureOut">
               <a:rPr lang="en-US" smtClean="0"/>
-              <a:t>3/3/26</a:t>
+              <a:t>3/31/26</a:t>
             </a:fld>
             <a:endParaRPr lang="en-US"/>
           </a:p>
@@ -913,7 +914,7 @@
           <a:p>
             <a:fld id="{7CAF7FD4-E345-3B4F-B408-1EAACE559263}" type="datetimeFigureOut">
               <a:rPr lang="en-US" smtClean="0"/>
-              <a:t>3/3/26</a:t>
+              <a:t>3/31/26</a:t>
             </a:fld>
             <a:endParaRPr lang="en-US"/>
           </a:p>
@@ -1114,7 +1115,7 @@
           <a:p>
             <a:fld id="{7CAF7FD4-E345-3B4F-B408-1EAACE559263}" type="datetimeFigureOut">
               <a:rPr lang="en-US" smtClean="0"/>
-              <a:t>3/3/26</a:t>
+              <a:t>3/31/26</a:t>
             </a:fld>
             <a:endParaRPr lang="en-US"/>
           </a:p>
@@ -1393,7 +1394,7 @@
           <a:p>
             <a:fld id="{7CAF7FD4-E345-3B4F-B408-1EAACE559263}" type="datetimeFigureOut">
               <a:rPr lang="en-US" smtClean="0"/>
-              <a:t>3/3/26</a:t>
+              <a:t>3/31/26</a:t>
             </a:fld>
             <a:endParaRPr lang="en-US"/>
           </a:p>
@@ -1661,7 +1662,7 @@
           <a:p>
             <a:fld id="{7CAF7FD4-E345-3B4F-B408-1EAACE559263}" type="datetimeFigureOut">
               <a:rPr lang="en-US" smtClean="0"/>
-              <a:t>3/3/26</a:t>
+              <a:t>3/31/26</a:t>
             </a:fld>
             <a:endParaRPr lang="en-US"/>
           </a:p>
@@ -2077,7 +2078,7 @@
           <a:p>
             <a:fld id="{7CAF7FD4-E345-3B4F-B408-1EAACE559263}" type="datetimeFigureOut">
               <a:rPr lang="en-US" smtClean="0"/>
-              <a:t>3/3/26</a:t>
+              <a:t>3/31/26</a:t>
             </a:fld>
             <a:endParaRPr lang="en-US"/>
           </a:p>
@@ -2226,7 +2227,7 @@
           <a:p>
             <a:fld id="{7CAF7FD4-E345-3B4F-B408-1EAACE559263}" type="datetimeFigureOut">
               <a:rPr lang="en-US" smtClean="0"/>
-              <a:t>3/3/26</a:t>
+              <a:t>3/31/26</a:t>
             </a:fld>
             <a:endParaRPr lang="en-US"/>
           </a:p>
@@ -2352,7 +2353,7 @@
           <a:p>
             <a:fld id="{7CAF7FD4-E345-3B4F-B408-1EAACE559263}" type="datetimeFigureOut">
               <a:rPr lang="en-US" smtClean="0"/>
-              <a:t>3/3/26</a:t>
+              <a:t>3/31/26</a:t>
             </a:fld>
             <a:endParaRPr lang="en-US"/>
           </a:p>
@@ -2603,7 +2604,7 @@
           <a:p>
             <a:fld id="{7CAF7FD4-E345-3B4F-B408-1EAACE559263}" type="datetimeFigureOut">
               <a:rPr lang="en-US" smtClean="0"/>
-              <a:t>3/3/26</a:t>
+              <a:t>3/31/26</a:t>
             </a:fld>
             <a:endParaRPr lang="en-US"/>
           </a:p>
@@ -3048,7 +3049,7 @@
           <a:p>
             <a:fld id="{7CAF7FD4-E345-3B4F-B408-1EAACE559263}" type="datetimeFigureOut">
               <a:rPr lang="en-US" smtClean="0"/>
-              <a:t>3/3/26</a:t>
+              <a:t>3/31/26</a:t>
             </a:fld>
             <a:endParaRPr lang="en-US"/>
           </a:p>
@@ -3382,7 +3383,7 @@
           <a:p>
             <a:fld id="{7CAF7FD4-E345-3B4F-B408-1EAACE559263}" type="datetimeFigureOut">
               <a:rPr lang="en-US" smtClean="0"/>
-              <a:t>3/3/26</a:t>
+              <a:t>3/31/26</a:t>
             </a:fld>
             <a:endParaRPr lang="en-US"/>
           </a:p>
@@ -5162,6 +5163,89 @@
           <p:cNvPr id="2" name="Title 1">
             <a:extLst>
               <a:ext uri="{FF2B5EF4-FFF2-40B4-BE49-F238E27FC236}">
+                <a16:creationId xmlns:a16="http://schemas.microsoft.com/office/drawing/2014/main" id="{5941AC61-E9CC-4F28-2B32-69E7C3D7768D}"/>
+              </a:ext>
+            </a:extLst>
+          </p:cNvPr>
+          <p:cNvSpPr>
+            <a:spLocks noGrp="1"/>
+          </p:cNvSpPr>
+          <p:nvPr>
+            <p:ph type="title"/>
+          </p:nvPr>
+        </p:nvSpPr>
+        <p:spPr/>
+        <p:txBody>
+          <a:bodyPr/>
+          <a:lstStyle/>
+          <a:p>
+            <a:r>
+              <a:rPr lang="en-US" dirty="0"/>
+              <a:t>If we can Get Something Stationary, It is easier to model</a:t>
+            </a:r>
+          </a:p>
+        </p:txBody>
+      </p:sp>
+      <p:sp>
+        <p:nvSpPr>
+          <p:cNvPr id="3" name="Content Placeholder 2">
+            <a:extLst>
+              <a:ext uri="{FF2B5EF4-FFF2-40B4-BE49-F238E27FC236}">
+                <a16:creationId xmlns:a16="http://schemas.microsoft.com/office/drawing/2014/main" id="{86FC1969-4280-A633-79AF-2ECDCEFE2751}"/>
+              </a:ext>
+            </a:extLst>
+          </p:cNvPr>
+          <p:cNvSpPr>
+            <a:spLocks noGrp="1"/>
+          </p:cNvSpPr>
+          <p:nvPr>
+            <p:ph idx="1"/>
+          </p:nvPr>
+        </p:nvSpPr>
+        <p:spPr/>
+        <p:txBody>
+          <a:bodyPr/>
+          <a:lstStyle/>
+          <a:p>
+            <a:endParaRPr lang="en-US"/>
+          </a:p>
+        </p:txBody>
+      </p:sp>
+    </p:spTree>
+    <p:extLst>
+      <p:ext uri="{BB962C8B-B14F-4D97-AF65-F5344CB8AC3E}">
+        <p14:creationId xmlns:p14="http://schemas.microsoft.com/office/powerpoint/2010/main" val="2606209512"/>
+      </p:ext>
+    </p:extLst>
+  </p:cSld>
+  <p:clrMapOvr>
+    <a:masterClrMapping/>
+  </p:clrMapOvr>
+</p:sld>
+</file>
+
+<file path=ppt/slides/slide17.xml><?xml version="1.0" encoding="utf-8"?>
+<p:sld xmlns:a="http://schemas.openxmlformats.org/drawingml/2006/main" xmlns:r="http://schemas.openxmlformats.org/officeDocument/2006/relationships" xmlns:p="http://schemas.openxmlformats.org/presentationml/2006/main">
+  <p:cSld>
+    <p:spTree>
+      <p:nvGrpSpPr>
+        <p:cNvPr id="1" name=""/>
+        <p:cNvGrpSpPr/>
+        <p:nvPr/>
+      </p:nvGrpSpPr>
+      <p:grpSpPr>
+        <a:xfrm>
+          <a:off x="0" y="0"/>
+          <a:ext cx="0" cy="0"/>
+          <a:chOff x="0" y="0"/>
+          <a:chExt cx="0" cy="0"/>
+        </a:xfrm>
+      </p:grpSpPr>
+      <p:sp>
+        <p:nvSpPr>
+          <p:cNvPr id="2" name="Title 1">
+            <a:extLst>
+              <a:ext uri="{FF2B5EF4-FFF2-40B4-BE49-F238E27FC236}">
                 <a16:creationId xmlns:a16="http://schemas.microsoft.com/office/drawing/2014/main" id="{48D6F2E3-C441-EA45-AFB0-16746E9DB104}"/>
               </a:ext>
             </a:extLst>
@@ -5285,7 +5369,7 @@
 </p:sld>
 </file>
 
-<file path=ppt/slides/slide17.xml><?xml version="1.0" encoding="utf-8"?>
+<file path=ppt/slides/slide18.xml><?xml version="1.0" encoding="utf-8"?>
 <p:sld xmlns:a="http://schemas.openxmlformats.org/drawingml/2006/main" xmlns:r="http://schemas.openxmlformats.org/officeDocument/2006/relationships" xmlns:p="http://schemas.openxmlformats.org/presentationml/2006/main">
   <p:cSld>
     <p:bg>
@@ -5467,7 +5551,7 @@
 </p:sld>
 </file>
 
-<file path=ppt/slides/slide18.xml><?xml version="1.0" encoding="utf-8"?>
+<file path=ppt/slides/slide19.xml><?xml version="1.0" encoding="utf-8"?>
 <p:sld xmlns:a="http://schemas.openxmlformats.org/drawingml/2006/main" xmlns:r="http://schemas.openxmlformats.org/officeDocument/2006/relationships" xmlns:p="http://schemas.openxmlformats.org/presentationml/2006/main">
   <p:cSld>
     <p:spTree>
@@ -5599,7 +5683,128 @@
 </p:sld>
 </file>
 
-<file path=ppt/slides/slide19.xml><?xml version="1.0" encoding="utf-8"?>
+<file path=ppt/slides/slide2.xml><?xml version="1.0" encoding="utf-8"?>
+<p:sld xmlns:a="http://schemas.openxmlformats.org/drawingml/2006/main" xmlns:r="http://schemas.openxmlformats.org/officeDocument/2006/relationships" xmlns:p="http://schemas.openxmlformats.org/presentationml/2006/main" show="0">
+  <p:cSld>
+    <p:spTree>
+      <p:nvGrpSpPr>
+        <p:cNvPr id="1" name=""/>
+        <p:cNvGrpSpPr/>
+        <p:nvPr/>
+      </p:nvGrpSpPr>
+      <p:grpSpPr>
+        <a:xfrm>
+          <a:off x="0" y="0"/>
+          <a:ext cx="0" cy="0"/>
+          <a:chOff x="0" y="0"/>
+          <a:chExt cx="0" cy="0"/>
+        </a:xfrm>
+      </p:grpSpPr>
+      <p:sp>
+        <p:nvSpPr>
+          <p:cNvPr id="2" name="Title 1">
+            <a:extLst>
+              <a:ext uri="{FF2B5EF4-FFF2-40B4-BE49-F238E27FC236}">
+                <a16:creationId xmlns:a16="http://schemas.microsoft.com/office/drawing/2014/main" id="{895088AB-F855-F539-BDBD-DF7174C29073}"/>
+              </a:ext>
+            </a:extLst>
+          </p:cNvPr>
+          <p:cNvSpPr>
+            <a:spLocks noGrp="1"/>
+          </p:cNvSpPr>
+          <p:nvPr>
+            <p:ph type="title"/>
+          </p:nvPr>
+        </p:nvSpPr>
+        <p:spPr/>
+        <p:txBody>
+          <a:bodyPr/>
+          <a:lstStyle/>
+          <a:p>
+            <a:r>
+              <a:rPr lang="en-US" dirty="0"/>
+              <a:t>Test Stuff</a:t>
+            </a:r>
+          </a:p>
+        </p:txBody>
+      </p:sp>
+      <p:sp>
+        <p:nvSpPr>
+          <p:cNvPr id="3" name="Content Placeholder 2">
+            <a:extLst>
+              <a:ext uri="{FF2B5EF4-FFF2-40B4-BE49-F238E27FC236}">
+                <a16:creationId xmlns:a16="http://schemas.microsoft.com/office/drawing/2014/main" id="{1F131C13-0A7B-2F52-C8D0-E07C377600A1}"/>
+              </a:ext>
+            </a:extLst>
+          </p:cNvPr>
+          <p:cNvSpPr>
+            <a:spLocks noGrp="1"/>
+          </p:cNvSpPr>
+          <p:nvPr>
+            <p:ph idx="1"/>
+          </p:nvPr>
+        </p:nvSpPr>
+        <p:spPr>
+          <a:xfrm>
+            <a:off x="1451579" y="2015732"/>
+            <a:ext cx="9603275" cy="3964282"/>
+          </a:xfrm>
+        </p:spPr>
+        <p:txBody>
+          <a:bodyPr/>
+          <a:lstStyle/>
+          <a:p>
+            <a:r>
+              <a:rPr lang="en-US" dirty="0"/>
+              <a:t>Good job overall. </a:t>
+            </a:r>
+          </a:p>
+          <a:p>
+            <a:r>
+              <a:rPr lang="en-US" dirty="0"/>
+              <a:t>Small notes:</a:t>
+            </a:r>
+          </a:p>
+          <a:p>
+            <a:pPr lvl="1"/>
+            <a:r>
+              <a:rPr lang="en-US" dirty="0"/>
+              <a:t>The kernel transformation and the kernel trick are separate. The transformation makes things work, the ‘trick’ allows it with less math. </a:t>
+            </a:r>
+          </a:p>
+          <a:p>
+            <a:pPr lvl="1"/>
+            <a:r>
+              <a:rPr lang="en-US" dirty="0"/>
+              <a:t>Forests are generally not really interpretable. </a:t>
+            </a:r>
+          </a:p>
+          <a:p>
+            <a:r>
+              <a:rPr lang="en-US" dirty="0"/>
+              <a:t>Dimensionality will continue to be important as we move to NN stuff. </a:t>
+            </a:r>
+          </a:p>
+          <a:p>
+            <a:pPr lvl="1"/>
+            <a:endParaRPr lang="en-US" dirty="0"/>
+          </a:p>
+        </p:txBody>
+      </p:sp>
+    </p:spTree>
+    <p:extLst>
+      <p:ext uri="{BB962C8B-B14F-4D97-AF65-F5344CB8AC3E}">
+        <p14:creationId xmlns:p14="http://schemas.microsoft.com/office/powerpoint/2010/main" val="2007408444"/>
+      </p:ext>
+    </p:extLst>
+  </p:cSld>
+  <p:clrMapOvr>
+    <a:masterClrMapping/>
+  </p:clrMapOvr>
+</p:sld>
+</file>
+
+<file path=ppt/slides/slide20.xml><?xml version="1.0" encoding="utf-8"?>
 <p:sld xmlns:a="http://schemas.openxmlformats.org/drawingml/2006/main" xmlns:r="http://schemas.openxmlformats.org/officeDocument/2006/relationships" xmlns:p="http://schemas.openxmlformats.org/presentationml/2006/main">
   <p:cSld>
     <p:spTree>
@@ -5763,253 +5968,6 @@
 </p:sld>
 </file>
 
-<file path=ppt/slides/slide2.xml><?xml version="1.0" encoding="utf-8"?>
-<p:sld xmlns:a="http://schemas.openxmlformats.org/drawingml/2006/main" xmlns:r="http://schemas.openxmlformats.org/officeDocument/2006/relationships" xmlns:p="http://schemas.openxmlformats.org/presentationml/2006/main" show="0">
-  <p:cSld>
-    <p:spTree>
-      <p:nvGrpSpPr>
-        <p:cNvPr id="1" name=""/>
-        <p:cNvGrpSpPr/>
-        <p:nvPr/>
-      </p:nvGrpSpPr>
-      <p:grpSpPr>
-        <a:xfrm>
-          <a:off x="0" y="0"/>
-          <a:ext cx="0" cy="0"/>
-          <a:chOff x="0" y="0"/>
-          <a:chExt cx="0" cy="0"/>
-        </a:xfrm>
-      </p:grpSpPr>
-      <p:sp>
-        <p:nvSpPr>
-          <p:cNvPr id="2" name="Title 1">
-            <a:extLst>
-              <a:ext uri="{FF2B5EF4-FFF2-40B4-BE49-F238E27FC236}">
-                <a16:creationId xmlns:a16="http://schemas.microsoft.com/office/drawing/2014/main" id="{895088AB-F855-F539-BDBD-DF7174C29073}"/>
-              </a:ext>
-            </a:extLst>
-          </p:cNvPr>
-          <p:cNvSpPr>
-            <a:spLocks noGrp="1"/>
-          </p:cNvSpPr>
-          <p:nvPr>
-            <p:ph type="title"/>
-          </p:nvPr>
-        </p:nvSpPr>
-        <p:spPr/>
-        <p:txBody>
-          <a:bodyPr/>
-          <a:lstStyle/>
-          <a:p>
-            <a:r>
-              <a:rPr lang="en-US" dirty="0"/>
-              <a:t>Test Stuff</a:t>
-            </a:r>
-          </a:p>
-        </p:txBody>
-      </p:sp>
-      <p:sp>
-        <p:nvSpPr>
-          <p:cNvPr id="3" name="Content Placeholder 2">
-            <a:extLst>
-              <a:ext uri="{FF2B5EF4-FFF2-40B4-BE49-F238E27FC236}">
-                <a16:creationId xmlns:a16="http://schemas.microsoft.com/office/drawing/2014/main" id="{1F131C13-0A7B-2F52-C8D0-E07C377600A1}"/>
-              </a:ext>
-            </a:extLst>
-          </p:cNvPr>
-          <p:cNvSpPr>
-            <a:spLocks noGrp="1"/>
-          </p:cNvSpPr>
-          <p:nvPr>
-            <p:ph idx="1"/>
-          </p:nvPr>
-        </p:nvSpPr>
-        <p:spPr>
-          <a:xfrm>
-            <a:off x="1451579" y="2015732"/>
-            <a:ext cx="9603275" cy="3964282"/>
-          </a:xfrm>
-        </p:spPr>
-        <p:txBody>
-          <a:bodyPr/>
-          <a:lstStyle/>
-          <a:p>
-            <a:r>
-              <a:rPr lang="en-US" dirty="0"/>
-              <a:t>Good job overall. </a:t>
-            </a:r>
-          </a:p>
-          <a:p>
-            <a:r>
-              <a:rPr lang="en-US" dirty="0"/>
-              <a:t>Small notes:</a:t>
-            </a:r>
-          </a:p>
-          <a:p>
-            <a:pPr lvl="1"/>
-            <a:r>
-              <a:rPr lang="en-US" dirty="0"/>
-              <a:t>The kernel transformation and the kernel trick are separate. The transformation makes things work, the ‘trick’ allows it with less math. </a:t>
-            </a:r>
-          </a:p>
-          <a:p>
-            <a:pPr lvl="1"/>
-            <a:r>
-              <a:rPr lang="en-US" dirty="0"/>
-              <a:t>Forests are generally not really interpretable. </a:t>
-            </a:r>
-          </a:p>
-          <a:p>
-            <a:r>
-              <a:rPr lang="en-US" dirty="0"/>
-              <a:t>Dimensionality will continue to be important as we move to NN stuff. </a:t>
-            </a:r>
-          </a:p>
-          <a:p>
-            <a:pPr lvl="1"/>
-            <a:endParaRPr lang="en-US" dirty="0"/>
-          </a:p>
-        </p:txBody>
-      </p:sp>
-    </p:spTree>
-    <p:extLst>
-      <p:ext uri="{BB962C8B-B14F-4D97-AF65-F5344CB8AC3E}">
-        <p14:creationId xmlns:p14="http://schemas.microsoft.com/office/powerpoint/2010/main" val="2007408444"/>
-      </p:ext>
-    </p:extLst>
-  </p:cSld>
-  <p:clrMapOvr>
-    <a:masterClrMapping/>
-  </p:clrMapOvr>
-</p:sld>
-</file>
-
-<file path=ppt/slides/slide20.xml><?xml version="1.0" encoding="utf-8"?>
-<p:sld xmlns:a="http://schemas.openxmlformats.org/drawingml/2006/main" xmlns:r="http://schemas.openxmlformats.org/officeDocument/2006/relationships" xmlns:p="http://schemas.openxmlformats.org/presentationml/2006/main">
-  <p:cSld>
-    <p:spTree>
-      <p:nvGrpSpPr>
-        <p:cNvPr id="1" name=""/>
-        <p:cNvGrpSpPr/>
-        <p:nvPr/>
-      </p:nvGrpSpPr>
-      <p:grpSpPr>
-        <a:xfrm>
-          <a:off x="0" y="0"/>
-          <a:ext cx="0" cy="0"/>
-          <a:chOff x="0" y="0"/>
-          <a:chExt cx="0" cy="0"/>
-        </a:xfrm>
-      </p:grpSpPr>
-      <p:sp>
-        <p:nvSpPr>
-          <p:cNvPr id="2" name="Title 1">
-            <a:extLst>
-              <a:ext uri="{FF2B5EF4-FFF2-40B4-BE49-F238E27FC236}">
-                <a16:creationId xmlns:a16="http://schemas.microsoft.com/office/drawing/2014/main" id="{1E301671-7911-14AC-D4D5-9602BE635904}"/>
-              </a:ext>
-            </a:extLst>
-          </p:cNvPr>
-          <p:cNvSpPr>
-            <a:spLocks noGrp="1"/>
-          </p:cNvSpPr>
-          <p:nvPr>
-            <p:ph type="title"/>
-          </p:nvPr>
-        </p:nvSpPr>
-        <p:spPr/>
-        <p:txBody>
-          <a:bodyPr/>
-          <a:lstStyle/>
-          <a:p>
-            <a:r>
-              <a:rPr lang="en-US" dirty="0"/>
-              <a:t>P and Q</a:t>
-            </a:r>
-          </a:p>
-        </p:txBody>
-      </p:sp>
-      <p:sp>
-        <p:nvSpPr>
-          <p:cNvPr id="3" name="Content Placeholder 2">
-            <a:extLst>
-              <a:ext uri="{FF2B5EF4-FFF2-40B4-BE49-F238E27FC236}">
-                <a16:creationId xmlns:a16="http://schemas.microsoft.com/office/drawing/2014/main" id="{D9A78AFD-5820-9530-33CA-3503BFEFD001}"/>
-              </a:ext>
-            </a:extLst>
-          </p:cNvPr>
-          <p:cNvSpPr>
-            <a:spLocks noGrp="1"/>
-          </p:cNvSpPr>
-          <p:nvPr>
-            <p:ph idx="1"/>
-          </p:nvPr>
-        </p:nvSpPr>
-        <p:spPr>
-          <a:xfrm>
-            <a:off x="1238081" y="1933996"/>
-            <a:ext cx="10034124" cy="4119485"/>
-          </a:xfrm>
-        </p:spPr>
-        <p:txBody>
-          <a:bodyPr>
-            <a:normAutofit/>
-          </a:bodyPr>
-          <a:lstStyle/>
-          <a:p>
-            <a:r>
-              <a:rPr lang="en-US" dirty="0"/>
-              <a:t>Determining the p and q values is kind of vague. </a:t>
-            </a:r>
-          </a:p>
-          <a:p>
-            <a:pPr lvl="1"/>
-            <a:r>
-              <a:rPr lang="en-US" dirty="0"/>
-              <a:t>These terms act with the d param like kernel/basis functions to do a stationary transformation. </a:t>
-            </a:r>
-          </a:p>
-          <a:p>
-            <a:r>
-              <a:rPr lang="en-US" dirty="0"/>
-              <a:t>We make guesses based off of what we can see in a couple of plots:</a:t>
-            </a:r>
-          </a:p>
-          <a:p>
-            <a:pPr lvl="1"/>
-            <a:r>
-              <a:rPr lang="en-US" dirty="0"/>
-              <a:t>ACF – residual autocorrelation. </a:t>
-            </a:r>
-          </a:p>
-          <a:p>
-            <a:pPr lvl="1"/>
-            <a:r>
-              <a:rPr lang="en-US" dirty="0"/>
-              <a:t>PACF – residual partial autocorrelation. </a:t>
-            </a:r>
-          </a:p>
-          <a:p>
-            <a:r>
-              <a:rPr lang="en-US" dirty="0"/>
-              <a:t>Note – there’s more detail that goes into selecting these things that is largely out of scope. We can make estimates and evaluate. </a:t>
-            </a:r>
-          </a:p>
-        </p:txBody>
-      </p:sp>
-    </p:spTree>
-    <p:extLst>
-      <p:ext uri="{BB962C8B-B14F-4D97-AF65-F5344CB8AC3E}">
-        <p14:creationId xmlns:p14="http://schemas.microsoft.com/office/powerpoint/2010/main" val="628860228"/>
-      </p:ext>
-    </p:extLst>
-  </p:cSld>
-  <p:clrMapOvr>
-    <a:masterClrMapping/>
-  </p:clrMapOvr>
-</p:sld>
-</file>
-
 <file path=ppt/slides/slide21.xml><?xml version="1.0" encoding="utf-8"?>
 <p:sld xmlns:a="http://schemas.openxmlformats.org/drawingml/2006/main" xmlns:r="http://schemas.openxmlformats.org/officeDocument/2006/relationships" xmlns:p="http://schemas.openxmlformats.org/presentationml/2006/main">
   <p:cSld>
@@ -6032,6 +5990,132 @@
           <p:cNvPr id="2" name="Title 1">
             <a:extLst>
               <a:ext uri="{FF2B5EF4-FFF2-40B4-BE49-F238E27FC236}">
+                <a16:creationId xmlns:a16="http://schemas.microsoft.com/office/drawing/2014/main" id="{1E301671-7911-14AC-D4D5-9602BE635904}"/>
+              </a:ext>
+            </a:extLst>
+          </p:cNvPr>
+          <p:cNvSpPr>
+            <a:spLocks noGrp="1"/>
+          </p:cNvSpPr>
+          <p:nvPr>
+            <p:ph type="title"/>
+          </p:nvPr>
+        </p:nvSpPr>
+        <p:spPr/>
+        <p:txBody>
+          <a:bodyPr/>
+          <a:lstStyle/>
+          <a:p>
+            <a:r>
+              <a:rPr lang="en-US" dirty="0"/>
+              <a:t>P and Q</a:t>
+            </a:r>
+          </a:p>
+        </p:txBody>
+      </p:sp>
+      <p:sp>
+        <p:nvSpPr>
+          <p:cNvPr id="3" name="Content Placeholder 2">
+            <a:extLst>
+              <a:ext uri="{FF2B5EF4-FFF2-40B4-BE49-F238E27FC236}">
+                <a16:creationId xmlns:a16="http://schemas.microsoft.com/office/drawing/2014/main" id="{D9A78AFD-5820-9530-33CA-3503BFEFD001}"/>
+              </a:ext>
+            </a:extLst>
+          </p:cNvPr>
+          <p:cNvSpPr>
+            <a:spLocks noGrp="1"/>
+          </p:cNvSpPr>
+          <p:nvPr>
+            <p:ph idx="1"/>
+          </p:nvPr>
+        </p:nvSpPr>
+        <p:spPr>
+          <a:xfrm>
+            <a:off x="1238081" y="1933996"/>
+            <a:ext cx="10034124" cy="4119485"/>
+          </a:xfrm>
+        </p:spPr>
+        <p:txBody>
+          <a:bodyPr>
+            <a:normAutofit/>
+          </a:bodyPr>
+          <a:lstStyle/>
+          <a:p>
+            <a:r>
+              <a:rPr lang="en-US" dirty="0"/>
+              <a:t>Determining the p and q values is kind of vague. </a:t>
+            </a:r>
+          </a:p>
+          <a:p>
+            <a:pPr lvl="1"/>
+            <a:r>
+              <a:rPr lang="en-US" dirty="0"/>
+              <a:t>These terms act with the d param like kernel/basis functions to do a stationary transformation. </a:t>
+            </a:r>
+          </a:p>
+          <a:p>
+            <a:r>
+              <a:rPr lang="en-US" dirty="0"/>
+              <a:t>We make guesses based off of what we can see in a couple of plots:</a:t>
+            </a:r>
+          </a:p>
+          <a:p>
+            <a:pPr lvl="1"/>
+            <a:r>
+              <a:rPr lang="en-US" dirty="0"/>
+              <a:t>ACF – residual autocorrelation. </a:t>
+            </a:r>
+          </a:p>
+          <a:p>
+            <a:pPr lvl="1"/>
+            <a:r>
+              <a:rPr lang="en-US" dirty="0"/>
+              <a:t>PACF – residual partial autocorrelation. </a:t>
+            </a:r>
+          </a:p>
+          <a:p>
+            <a:r>
+              <a:rPr lang="en-US" dirty="0"/>
+              <a:t>Note – there’s more detail that goes into selecting these things that is largely out of scope. We can make estimates and evaluate. </a:t>
+            </a:r>
+          </a:p>
+        </p:txBody>
+      </p:sp>
+    </p:spTree>
+    <p:extLst>
+      <p:ext uri="{BB962C8B-B14F-4D97-AF65-F5344CB8AC3E}">
+        <p14:creationId xmlns:p14="http://schemas.microsoft.com/office/powerpoint/2010/main" val="628860228"/>
+      </p:ext>
+    </p:extLst>
+  </p:cSld>
+  <p:clrMapOvr>
+    <a:masterClrMapping/>
+  </p:clrMapOvr>
+</p:sld>
+</file>
+
+<file path=ppt/slides/slide22.xml><?xml version="1.0" encoding="utf-8"?>
+<p:sld xmlns:a="http://schemas.openxmlformats.org/drawingml/2006/main" xmlns:r="http://schemas.openxmlformats.org/officeDocument/2006/relationships" xmlns:p="http://schemas.openxmlformats.org/presentationml/2006/main">
+  <p:cSld>
+    <p:spTree>
+      <p:nvGrpSpPr>
+        <p:cNvPr id="1" name=""/>
+        <p:cNvGrpSpPr/>
+        <p:nvPr/>
+      </p:nvGrpSpPr>
+      <p:grpSpPr>
+        <a:xfrm>
+          <a:off x="0" y="0"/>
+          <a:ext cx="0" cy="0"/>
+          <a:chOff x="0" y="0"/>
+          <a:chExt cx="0" cy="0"/>
+        </a:xfrm>
+      </p:grpSpPr>
+      <p:sp>
+        <p:nvSpPr>
+          <p:cNvPr id="2" name="Title 1">
+            <a:extLst>
+              <a:ext uri="{FF2B5EF4-FFF2-40B4-BE49-F238E27FC236}">
                 <a16:creationId xmlns:a16="http://schemas.microsoft.com/office/drawing/2014/main" id="{E315D5B2-E808-5298-6064-A28E494EEB36}"/>
               </a:ext>
             </a:extLst>
@@ -6145,7 +6229,7 @@
 </p:sld>
 </file>
 
-<file path=ppt/slides/slide22.xml><?xml version="1.0" encoding="utf-8"?>
+<file path=ppt/slides/slide23.xml><?xml version="1.0" encoding="utf-8"?>
 <p:sld xmlns:a="http://schemas.openxmlformats.org/drawingml/2006/main" xmlns:r="http://schemas.openxmlformats.org/officeDocument/2006/relationships" xmlns:p="http://schemas.openxmlformats.org/presentationml/2006/main">
   <p:cSld>
     <p:spTree>
@@ -6302,7 +6386,7 @@
 </p:sld>
 </file>
 
-<file path=ppt/slides/slide23.xml><?xml version="1.0" encoding="utf-8"?>
+<file path=ppt/slides/slide24.xml><?xml version="1.0" encoding="utf-8"?>
 <p:sld xmlns:a="http://schemas.openxmlformats.org/drawingml/2006/main" xmlns:r="http://schemas.openxmlformats.org/officeDocument/2006/relationships" xmlns:p="http://schemas.openxmlformats.org/presentationml/2006/main">
   <p:cSld>
     <p:spTree>
@@ -6470,7 +6554,7 @@
 </p:sld>
 </file>
 
-<file path=ppt/slides/slide24.xml><?xml version="1.0" encoding="utf-8"?>
+<file path=ppt/slides/slide25.xml><?xml version="1.0" encoding="utf-8"?>
 <p:sld xmlns:a="http://schemas.openxmlformats.org/drawingml/2006/main" xmlns:r="http://schemas.openxmlformats.org/officeDocument/2006/relationships" xmlns:p="http://schemas.openxmlformats.org/presentationml/2006/main">
   <p:cSld>
     <p:spTree>
@@ -6568,7 +6652,7 @@
 </p:sld>
 </file>
 
-<file path=ppt/slides/slide25.xml><?xml version="1.0" encoding="utf-8"?>
+<file path=ppt/slides/slide26.xml><?xml version="1.0" encoding="utf-8"?>
 <p:sld xmlns:a="http://schemas.openxmlformats.org/drawingml/2006/main" xmlns:r="http://schemas.openxmlformats.org/officeDocument/2006/relationships" xmlns:p="http://schemas.openxmlformats.org/presentationml/2006/main" show="0">
   <p:cSld>
     <p:spTree>
@@ -6697,7 +6781,7 @@
 </p:sld>
 </file>
 
-<file path=ppt/slides/slide26.xml><?xml version="1.0" encoding="utf-8"?>
+<file path=ppt/slides/slide27.xml><?xml version="1.0" encoding="utf-8"?>
 <p:sld xmlns:a="http://schemas.openxmlformats.org/drawingml/2006/main" xmlns:r="http://schemas.openxmlformats.org/officeDocument/2006/relationships" xmlns:p="http://schemas.openxmlformats.org/presentationml/2006/main" show="0">
   <p:cSld>
     <p:spTree>
@@ -6826,7 +6910,7 @@
 </p:sld>
 </file>
 
-<file path=ppt/slides/slide27.xml><?xml version="1.0" encoding="utf-8"?>
+<file path=ppt/slides/slide28.xml><?xml version="1.0" encoding="utf-8"?>
 <p:sld xmlns:a="http://schemas.openxmlformats.org/drawingml/2006/main" xmlns:r="http://schemas.openxmlformats.org/officeDocument/2006/relationships" xmlns:p="http://schemas.openxmlformats.org/presentationml/2006/main" show="0">
   <p:cSld>
     <p:spTree>
@@ -6955,183 +7039,6 @@
 </p:sld>
 </file>
 
-<file path=ppt/slides/slide28.xml><?xml version="1.0" encoding="utf-8"?>
-<p:sld xmlns:a="http://schemas.openxmlformats.org/drawingml/2006/main" xmlns:r="http://schemas.openxmlformats.org/officeDocument/2006/relationships" xmlns:p="http://schemas.openxmlformats.org/presentationml/2006/main">
-  <p:cSld>
-    <p:spTree>
-      <p:nvGrpSpPr>
-        <p:cNvPr id="1" name=""/>
-        <p:cNvGrpSpPr/>
-        <p:nvPr/>
-      </p:nvGrpSpPr>
-      <p:grpSpPr>
-        <a:xfrm>
-          <a:off x="0" y="0"/>
-          <a:ext cx="0" cy="0"/>
-          <a:chOff x="0" y="0"/>
-          <a:chExt cx="0" cy="0"/>
-        </a:xfrm>
-      </p:grpSpPr>
-      <p:sp>
-        <p:nvSpPr>
-          <p:cNvPr id="2" name="Title 1">
-            <a:extLst>
-              <a:ext uri="{FF2B5EF4-FFF2-40B4-BE49-F238E27FC236}">
-                <a16:creationId xmlns:a16="http://schemas.microsoft.com/office/drawing/2014/main" id="{6E1A8DAA-594E-DF46-8A5F-F8BFE936389B}"/>
-              </a:ext>
-            </a:extLst>
-          </p:cNvPr>
-          <p:cNvSpPr>
-            <a:spLocks noGrp="1"/>
-          </p:cNvSpPr>
-          <p:nvPr>
-            <p:ph type="title"/>
-          </p:nvPr>
-        </p:nvSpPr>
-        <p:spPr/>
-        <p:txBody>
-          <a:bodyPr/>
-          <a:lstStyle/>
-          <a:p>
-            <a:r>
-              <a:rPr lang="en-US" dirty="0"/>
-              <a:t>Implementation</a:t>
-            </a:r>
-          </a:p>
-        </p:txBody>
-      </p:sp>
-      <p:sp>
-        <p:nvSpPr>
-          <p:cNvPr id="3" name="Content Placeholder 2">
-            <a:extLst>
-              <a:ext uri="{FF2B5EF4-FFF2-40B4-BE49-F238E27FC236}">
-                <a16:creationId xmlns:a16="http://schemas.microsoft.com/office/drawing/2014/main" id="{F521AF14-542C-D24F-AB24-180660807542}"/>
-              </a:ext>
-            </a:extLst>
-          </p:cNvPr>
-          <p:cNvSpPr>
-            <a:spLocks noGrp="1"/>
-          </p:cNvSpPr>
-          <p:nvPr>
-            <p:ph idx="1"/>
-          </p:nvPr>
-        </p:nvSpPr>
-        <p:spPr>
-          <a:xfrm>
-            <a:off x="1451579" y="2015732"/>
-            <a:ext cx="9603275" cy="4037749"/>
-          </a:xfrm>
-        </p:spPr>
-        <p:txBody>
-          <a:bodyPr/>
-          <a:lstStyle/>
-          <a:p>
-            <a:r>
-              <a:rPr lang="en-US" dirty="0" err="1"/>
-              <a:t>Sktime</a:t>
-            </a:r>
-            <a:r>
-              <a:rPr lang="en-US" dirty="0"/>
-              <a:t> is a wrapper that packages time series functionality, largely from </a:t>
-            </a:r>
-            <a:r>
-              <a:rPr lang="en-US" dirty="0" err="1"/>
-              <a:t>statsmodels</a:t>
-            </a:r>
-            <a:r>
-              <a:rPr lang="en-US" dirty="0"/>
-              <a:t>, into a </a:t>
-            </a:r>
-            <a:r>
-              <a:rPr lang="en-US" dirty="0" err="1"/>
-              <a:t>sklearn-ish</a:t>
-            </a:r>
-            <a:r>
-              <a:rPr lang="en-US" dirty="0"/>
-              <a:t> format. </a:t>
-            </a:r>
-          </a:p>
-          <a:p>
-            <a:pPr lvl="1"/>
-            <a:r>
-              <a:rPr lang="en-US" dirty="0" err="1"/>
-              <a:t>Statsmodels</a:t>
-            </a:r>
-            <a:r>
-              <a:rPr lang="en-US" dirty="0"/>
-              <a:t> documentation is not the best. </a:t>
-            </a:r>
-          </a:p>
-          <a:p>
-            <a:pPr lvl="1"/>
-            <a:r>
-              <a:rPr lang="en-US" dirty="0" err="1"/>
-              <a:t>Statsmodels</a:t>
-            </a:r>
-            <a:r>
-              <a:rPr lang="en-US" dirty="0"/>
-              <a:t> code is structured quite differently. </a:t>
-            </a:r>
-          </a:p>
-          <a:p>
-            <a:r>
-              <a:rPr lang="en-US" dirty="0"/>
-              <a:t>Allows us to do basic time series at a higher level, much more easily. </a:t>
-            </a:r>
-          </a:p>
-          <a:p>
-            <a:r>
-              <a:rPr lang="en-US" dirty="0"/>
-              <a:t>ARIMA details previously can be replaced with </a:t>
-            </a:r>
-            <a:r>
-              <a:rPr lang="en-US" dirty="0" err="1"/>
-              <a:t>AutoARIMA</a:t>
-            </a:r>
-            <a:r>
-              <a:rPr lang="en-US" dirty="0"/>
-              <a:t>. </a:t>
-            </a:r>
-          </a:p>
-          <a:p>
-            <a:pPr lvl="1"/>
-            <a:r>
-              <a:rPr lang="en-US" dirty="0" err="1"/>
-              <a:t>AutoARIMA</a:t>
-            </a:r>
-            <a:r>
-              <a:rPr lang="en-US" dirty="0"/>
-              <a:t> will perform an optimization algorithm to find good parameters. </a:t>
-            </a:r>
-          </a:p>
-          <a:p>
-            <a:r>
-              <a:rPr lang="en-US" dirty="0"/>
-              <a:t>Key notes:</a:t>
-            </a:r>
-          </a:p>
-          <a:p>
-            <a:pPr lvl="1"/>
-            <a:r>
-              <a:rPr lang="en-US" dirty="0"/>
-              <a:t>Train-test split is now normally just the last X records are test data. </a:t>
-            </a:r>
-          </a:p>
-        </p:txBody>
-      </p:sp>
-    </p:spTree>
-    <p:extLst>
-      <p:ext uri="{BB962C8B-B14F-4D97-AF65-F5344CB8AC3E}">
-        <p14:creationId xmlns:p14="http://schemas.microsoft.com/office/powerpoint/2010/main" val="450521076"/>
-      </p:ext>
-    </p:extLst>
-  </p:cSld>
-  <p:clrMapOvr>
-    <a:masterClrMapping/>
-  </p:clrMapOvr>
-</p:sld>
-</file>
-
 <file path=ppt/slides/slide29.xml><?xml version="1.0" encoding="utf-8"?>
 <p:sld xmlns:a="http://schemas.openxmlformats.org/drawingml/2006/main" xmlns:r="http://schemas.openxmlformats.org/officeDocument/2006/relationships" xmlns:p="http://schemas.openxmlformats.org/presentationml/2006/main">
   <p:cSld>
@@ -7154,7 +7061,7 @@
           <p:cNvPr id="2" name="Title 1">
             <a:extLst>
               <a:ext uri="{FF2B5EF4-FFF2-40B4-BE49-F238E27FC236}">
-                <a16:creationId xmlns:a16="http://schemas.microsoft.com/office/drawing/2014/main" id="{1A4F55AA-C223-9E51-2A63-2B3C5AB9636B}"/>
+                <a16:creationId xmlns:a16="http://schemas.microsoft.com/office/drawing/2014/main" id="{6E1A8DAA-594E-DF46-8A5F-F8BFE936389B}"/>
               </a:ext>
             </a:extLst>
           </p:cNvPr>
@@ -7170,54 +7077,128 @@
           <a:bodyPr/>
           <a:lstStyle/>
           <a:p>
+            <a:r>
+              <a:rPr lang="en-US" dirty="0"/>
+              <a:t>Implementation</a:t>
+            </a:r>
+          </a:p>
+        </p:txBody>
+      </p:sp>
+      <p:sp>
+        <p:nvSpPr>
+          <p:cNvPr id="3" name="Content Placeholder 2">
+            <a:extLst>
+              <a:ext uri="{FF2B5EF4-FFF2-40B4-BE49-F238E27FC236}">
+                <a16:creationId xmlns:a16="http://schemas.microsoft.com/office/drawing/2014/main" id="{F521AF14-542C-D24F-AB24-180660807542}"/>
+              </a:ext>
+            </a:extLst>
+          </p:cNvPr>
+          <p:cNvSpPr>
+            <a:spLocks noGrp="1"/>
+          </p:cNvSpPr>
+          <p:nvPr>
+            <p:ph idx="1"/>
+          </p:nvPr>
+        </p:nvSpPr>
+        <p:spPr>
+          <a:xfrm>
+            <a:off x="1451579" y="2015732"/>
+            <a:ext cx="9603275" cy="4037749"/>
+          </a:xfrm>
+        </p:spPr>
+        <p:txBody>
+          <a:bodyPr/>
+          <a:lstStyle/>
+          <a:p>
+            <a:r>
+              <a:rPr lang="en-US" dirty="0" err="1"/>
+              <a:t>Sktime</a:t>
+            </a:r>
+            <a:r>
+              <a:rPr lang="en-US" dirty="0"/>
+              <a:t> is a wrapper that packages time series functionality, largely from </a:t>
+            </a:r>
+            <a:r>
+              <a:rPr lang="en-US" dirty="0" err="1"/>
+              <a:t>statsmodels</a:t>
+            </a:r>
+            <a:r>
+              <a:rPr lang="en-US" dirty="0"/>
+              <a:t>, into a </a:t>
+            </a:r>
+            <a:r>
+              <a:rPr lang="en-US" dirty="0" err="1"/>
+              <a:t>sklearn-ish</a:t>
+            </a:r>
+            <a:r>
+              <a:rPr lang="en-US" dirty="0"/>
+              <a:t> format. </a:t>
+            </a:r>
+          </a:p>
+          <a:p>
+            <a:pPr lvl="1"/>
+            <a:r>
+              <a:rPr lang="en-US" dirty="0" err="1"/>
+              <a:t>Statsmodels</a:t>
+            </a:r>
+            <a:r>
+              <a:rPr lang="en-US" dirty="0"/>
+              <a:t> documentation is not the best. </a:t>
+            </a:r>
+          </a:p>
+          <a:p>
+            <a:pPr lvl="1"/>
+            <a:r>
+              <a:rPr lang="en-US" dirty="0" err="1"/>
+              <a:t>Statsmodels</a:t>
+            </a:r>
+            <a:r>
+              <a:rPr lang="en-US" dirty="0"/>
+              <a:t> code is structured quite differently. </a:t>
+            </a:r>
+          </a:p>
+          <a:p>
+            <a:r>
+              <a:rPr lang="en-US" dirty="0"/>
+              <a:t>Allows us to do basic time series at a higher level, much more easily. </a:t>
+            </a:r>
+          </a:p>
+          <a:p>
+            <a:r>
+              <a:rPr lang="en-US" dirty="0"/>
+              <a:t>ARIMA details previously can be replaced with </a:t>
+            </a:r>
             <a:r>
               <a:rPr lang="en-US" dirty="0" err="1"/>
               <a:t>AutoARIMA</a:t>
             </a:r>
-            <a:endParaRPr lang="en-US" dirty="0"/>
-          </a:p>
-        </p:txBody>
-      </p:sp>
-      <p:sp>
-        <p:nvSpPr>
-          <p:cNvPr id="3" name="Content Placeholder 2">
-            <a:extLst>
-              <a:ext uri="{FF2B5EF4-FFF2-40B4-BE49-F238E27FC236}">
-                <a16:creationId xmlns:a16="http://schemas.microsoft.com/office/drawing/2014/main" id="{A54D11BF-4D97-6FA1-1844-CC8CA0D9F1A5}"/>
-              </a:ext>
-            </a:extLst>
-          </p:cNvPr>
-          <p:cNvSpPr>
-            <a:spLocks noGrp="1"/>
-          </p:cNvSpPr>
-          <p:nvPr>
-            <p:ph idx="1"/>
-          </p:nvPr>
-        </p:nvSpPr>
-        <p:spPr/>
-        <p:txBody>
-          <a:bodyPr/>
-          <a:lstStyle/>
-          <a:p>
+            <a:r>
+              <a:rPr lang="en-US" dirty="0"/>
+              <a:t>. </a:t>
+            </a:r>
+          </a:p>
+          <a:p>
+            <a:pPr lvl="1"/>
             <a:r>
               <a:rPr lang="en-US" dirty="0" err="1"/>
               <a:t>AutoARIMA</a:t>
             </a:r>
             <a:r>
               <a:rPr lang="en-US" dirty="0"/>
-              <a:t> basically does the parameter finding process for us. </a:t>
-            </a:r>
-          </a:p>
-          <a:p>
-            <a:r>
-              <a:rPr lang="en-US" dirty="0"/>
-              <a:t>We can add in other transformers for things like trends. </a:t>
-            </a:r>
-          </a:p>
-          <a:p>
-            <a:r>
-              <a:rPr lang="en-US" dirty="0"/>
-              <a:t>We need to find the broad parameters, but the details are automated. </a:t>
+              <a:t> will perform an optimization algorithm to find good parameters. </a:t>
+            </a:r>
+          </a:p>
+          <a:p>
+            <a:r>
+              <a:rPr lang="en-US" dirty="0"/>
+              <a:t>Key notes:</a:t>
+            </a:r>
+          </a:p>
+          <a:p>
+            <a:pPr lvl="1"/>
+            <a:r>
+              <a:rPr lang="en-US" dirty="0"/>
+              <a:t>Train-test split is now normally just the last X records are test data. </a:t>
             </a:r>
           </a:p>
         </p:txBody>
@@ -7225,7 +7206,7 @@
     </p:spTree>
     <p:extLst>
       <p:ext uri="{BB962C8B-B14F-4D97-AF65-F5344CB8AC3E}">
-        <p14:creationId xmlns:p14="http://schemas.microsoft.com/office/powerpoint/2010/main" val="3741533776"/>
+        <p14:creationId xmlns:p14="http://schemas.microsoft.com/office/powerpoint/2010/main" val="450521076"/>
       </p:ext>
     </p:extLst>
   </p:cSld>
@@ -7298,8 +7279,8 @@
         </p:nvSpPr>
         <p:spPr>
           <a:xfrm>
-            <a:off x="1451579" y="1938130"/>
-            <a:ext cx="9603275" cy="3886200"/>
+            <a:off x="1451579" y="1853753"/>
+            <a:ext cx="9603275" cy="4199727"/>
           </a:xfrm>
         </p:spPr>
         <p:txBody>
@@ -7351,7 +7332,7 @@
           <a:p>
             <a:r>
               <a:rPr lang="en-US" dirty="0"/>
-              <a:t>You’re supposed to have a test next week!</a:t>
+              <a:t>You’re supposed to have a test soon!</a:t>
             </a:r>
           </a:p>
           <a:p>
@@ -7366,6 +7347,19 @@
             <a:r>
               <a:rPr lang="en-US" dirty="0"/>
               <a:t>~20 questions, about 50/50 MC/short answer. It’s pretty straightforward. </a:t>
+            </a:r>
+          </a:p>
+          <a:p>
+            <a:r>
+              <a:rPr lang="en-US" dirty="0"/>
+              <a:t>Self-check: given a tabular or image dataset (in ~any format), you can make &amp; tune. </a:t>
+            </a:r>
+          </a:p>
+          <a:p>
+            <a:pPr lvl="1"/>
+            <a:r>
+              <a:rPr lang="en-US" dirty="0"/>
+              <a:t>Looking up stuff in documentation and examples is fine and good. </a:t>
             </a:r>
           </a:p>
           <a:p>
@@ -7388,6 +7382,109 @@
 </file>
 
 <file path=ppt/slides/slide30.xml><?xml version="1.0" encoding="utf-8"?>
+<p:sld xmlns:a="http://schemas.openxmlformats.org/drawingml/2006/main" xmlns:r="http://schemas.openxmlformats.org/officeDocument/2006/relationships" xmlns:p="http://schemas.openxmlformats.org/presentationml/2006/main">
+  <p:cSld>
+    <p:spTree>
+      <p:nvGrpSpPr>
+        <p:cNvPr id="1" name=""/>
+        <p:cNvGrpSpPr/>
+        <p:nvPr/>
+      </p:nvGrpSpPr>
+      <p:grpSpPr>
+        <a:xfrm>
+          <a:off x="0" y="0"/>
+          <a:ext cx="0" cy="0"/>
+          <a:chOff x="0" y="0"/>
+          <a:chExt cx="0" cy="0"/>
+        </a:xfrm>
+      </p:grpSpPr>
+      <p:sp>
+        <p:nvSpPr>
+          <p:cNvPr id="2" name="Title 1">
+            <a:extLst>
+              <a:ext uri="{FF2B5EF4-FFF2-40B4-BE49-F238E27FC236}">
+                <a16:creationId xmlns:a16="http://schemas.microsoft.com/office/drawing/2014/main" id="{1A4F55AA-C223-9E51-2A63-2B3C5AB9636B}"/>
+              </a:ext>
+            </a:extLst>
+          </p:cNvPr>
+          <p:cNvSpPr>
+            <a:spLocks noGrp="1"/>
+          </p:cNvSpPr>
+          <p:nvPr>
+            <p:ph type="title"/>
+          </p:nvPr>
+        </p:nvSpPr>
+        <p:spPr/>
+        <p:txBody>
+          <a:bodyPr/>
+          <a:lstStyle/>
+          <a:p>
+            <a:r>
+              <a:rPr lang="en-US" dirty="0" err="1"/>
+              <a:t>AutoARIMA</a:t>
+            </a:r>
+            <a:endParaRPr lang="en-US" dirty="0"/>
+          </a:p>
+        </p:txBody>
+      </p:sp>
+      <p:sp>
+        <p:nvSpPr>
+          <p:cNvPr id="3" name="Content Placeholder 2">
+            <a:extLst>
+              <a:ext uri="{FF2B5EF4-FFF2-40B4-BE49-F238E27FC236}">
+                <a16:creationId xmlns:a16="http://schemas.microsoft.com/office/drawing/2014/main" id="{A54D11BF-4D97-6FA1-1844-CC8CA0D9F1A5}"/>
+              </a:ext>
+            </a:extLst>
+          </p:cNvPr>
+          <p:cNvSpPr>
+            <a:spLocks noGrp="1"/>
+          </p:cNvSpPr>
+          <p:nvPr>
+            <p:ph idx="1"/>
+          </p:nvPr>
+        </p:nvSpPr>
+        <p:spPr/>
+        <p:txBody>
+          <a:bodyPr/>
+          <a:lstStyle/>
+          <a:p>
+            <a:r>
+              <a:rPr lang="en-US" dirty="0" err="1"/>
+              <a:t>AutoARIMA</a:t>
+            </a:r>
+            <a:r>
+              <a:rPr lang="en-US" dirty="0"/>
+              <a:t> basically does the parameter finding process for us. </a:t>
+            </a:r>
+          </a:p>
+          <a:p>
+            <a:r>
+              <a:rPr lang="en-US" dirty="0"/>
+              <a:t>We can add in other transformers for things like trends. </a:t>
+            </a:r>
+          </a:p>
+          <a:p>
+            <a:r>
+              <a:rPr lang="en-US" dirty="0"/>
+              <a:t>We need to find the broad parameters, but the details are automated. </a:t>
+            </a:r>
+          </a:p>
+        </p:txBody>
+      </p:sp>
+    </p:spTree>
+    <p:extLst>
+      <p:ext uri="{BB962C8B-B14F-4D97-AF65-F5344CB8AC3E}">
+        <p14:creationId xmlns:p14="http://schemas.microsoft.com/office/powerpoint/2010/main" val="3741533776"/>
+      </p:ext>
+    </p:extLst>
+  </p:cSld>
+  <p:clrMapOvr>
+    <a:masterClrMapping/>
+  </p:clrMapOvr>
+</p:sld>
+</file>
+
+<file path=ppt/slides/slide31.xml><?xml version="1.0" encoding="utf-8"?>
 <p:sld xmlns:a="http://schemas.openxmlformats.org/drawingml/2006/main" xmlns:r="http://schemas.openxmlformats.org/officeDocument/2006/relationships" xmlns:p="http://schemas.openxmlformats.org/presentationml/2006/main">
   <p:cSld>
     <p:bg>
@@ -7561,150 +7658,6 @@
     <p:extLst>
       <p:ext uri="{BB962C8B-B14F-4D97-AF65-F5344CB8AC3E}">
         <p14:creationId xmlns:p14="http://schemas.microsoft.com/office/powerpoint/2010/main" val="3074098105"/>
-      </p:ext>
-    </p:extLst>
-  </p:cSld>
-  <p:clrMapOvr>
-    <a:masterClrMapping/>
-  </p:clrMapOvr>
-</p:sld>
-</file>
-
-<file path=ppt/slides/slide31.xml><?xml version="1.0" encoding="utf-8"?>
-<p:sld xmlns:a="http://schemas.openxmlformats.org/drawingml/2006/main" xmlns:r="http://schemas.openxmlformats.org/officeDocument/2006/relationships" xmlns:p="http://schemas.openxmlformats.org/presentationml/2006/main">
-  <p:cSld>
-    <p:spTree>
-      <p:nvGrpSpPr>
-        <p:cNvPr id="1" name=""/>
-        <p:cNvGrpSpPr/>
-        <p:nvPr/>
-      </p:nvGrpSpPr>
-      <p:grpSpPr>
-        <a:xfrm>
-          <a:off x="0" y="0"/>
-          <a:ext cx="0" cy="0"/>
-          <a:chOff x="0" y="0"/>
-          <a:chExt cx="0" cy="0"/>
-        </a:xfrm>
-      </p:grpSpPr>
-      <p:sp>
-        <p:nvSpPr>
-          <p:cNvPr id="2" name="Title 1">
-            <a:extLst>
-              <a:ext uri="{FF2B5EF4-FFF2-40B4-BE49-F238E27FC236}">
-                <a16:creationId xmlns:a16="http://schemas.microsoft.com/office/drawing/2014/main" id="{45AFEB03-F569-127D-BACE-8B1BE1D1F824}"/>
-              </a:ext>
-            </a:extLst>
-          </p:cNvPr>
-          <p:cNvSpPr>
-            <a:spLocks noGrp="1"/>
-          </p:cNvSpPr>
-          <p:nvPr>
-            <p:ph type="title"/>
-          </p:nvPr>
-        </p:nvSpPr>
-        <p:spPr/>
-        <p:txBody>
-          <a:bodyPr/>
-          <a:lstStyle/>
-          <a:p>
-            <a:r>
-              <a:rPr lang="en-US" dirty="0"/>
-              <a:t>With Cross validation</a:t>
-            </a:r>
-          </a:p>
-        </p:txBody>
-      </p:sp>
-      <p:sp>
-        <p:nvSpPr>
-          <p:cNvPr id="3" name="Content Placeholder 2">
-            <a:extLst>
-              <a:ext uri="{FF2B5EF4-FFF2-40B4-BE49-F238E27FC236}">
-                <a16:creationId xmlns:a16="http://schemas.microsoft.com/office/drawing/2014/main" id="{77CA433B-A410-34D2-CDFF-C59C620D6E66}"/>
-              </a:ext>
-            </a:extLst>
-          </p:cNvPr>
-          <p:cNvSpPr>
-            <a:spLocks noGrp="1"/>
-          </p:cNvSpPr>
-          <p:nvPr>
-            <p:ph idx="1"/>
-          </p:nvPr>
-        </p:nvSpPr>
-        <p:spPr>
-          <a:xfrm>
-            <a:off x="1451579" y="2015733"/>
-            <a:ext cx="9603275" cy="1260868"/>
-          </a:xfrm>
-        </p:spPr>
-        <p:txBody>
-          <a:bodyPr/>
-          <a:lstStyle/>
-          <a:p>
-            <a:r>
-              <a:rPr lang="en-US" dirty="0"/>
-              <a:t>With cross validation, we need to do a similar split, but moving over time. </a:t>
-            </a:r>
-          </a:p>
-          <a:p>
-            <a:r>
-              <a:rPr lang="en-US" dirty="0"/>
-              <a:t>If there’s a trend that we haven’t captured, that’ll impact things with drift here. </a:t>
-            </a:r>
-          </a:p>
-        </p:txBody>
-      </p:sp>
-      <p:pic>
-        <p:nvPicPr>
-          <p:cNvPr id="2050" name="Picture 2" descr="Is a random sample a good approach to partition a time series into training  and validation data sets? Why or why not? - Quora">
-            <a:extLst>
-              <a:ext uri="{FF2B5EF4-FFF2-40B4-BE49-F238E27FC236}">
-                <a16:creationId xmlns:a16="http://schemas.microsoft.com/office/drawing/2014/main" id="{8198495F-FBA3-D64D-87DE-8F68AF0241A3}"/>
-              </a:ext>
-            </a:extLst>
-          </p:cNvPr>
-          <p:cNvPicPr>
-            <a:picLocks noChangeAspect="1" noChangeArrowheads="1"/>
-          </p:cNvPicPr>
-          <p:nvPr/>
-        </p:nvPicPr>
-        <p:blipFill>
-          <a:blip r:embed="rId2">
-            <a:extLst>
-              <a:ext uri="{28A0092B-C50C-407E-A947-70E740481C1C}">
-                <a14:useLocalDpi xmlns:a14="http://schemas.microsoft.com/office/drawing/2010/main" val="0"/>
-              </a:ext>
-            </a:extLst>
-          </a:blip>
-          <a:srcRect/>
-          <a:stretch>
-            <a:fillRect/>
-          </a:stretch>
-        </p:blipFill>
-        <p:spPr bwMode="auto">
-          <a:xfrm>
-            <a:off x="2273300" y="3276600"/>
-            <a:ext cx="7645400" cy="3581400"/>
-          </a:xfrm>
-          <a:prstGeom prst="rect">
-            <a:avLst/>
-          </a:prstGeom>
-          <a:noFill/>
-          <a:extLst>
-            <a:ext uri="{909E8E84-426E-40DD-AFC4-6F175D3DCCD1}">
-              <a14:hiddenFill xmlns:a14="http://schemas.microsoft.com/office/drawing/2010/main">
-                <a:solidFill>
-                  <a:srgbClr val="FFFFFF"/>
-                </a:solidFill>
-              </a14:hiddenFill>
-            </a:ext>
-          </a:extLst>
-        </p:spPr>
-      </p:pic>
-    </p:spTree>
-    <p:extLst>
-      <p:ext uri="{BB962C8B-B14F-4D97-AF65-F5344CB8AC3E}">
-        <p14:creationId xmlns:p14="http://schemas.microsoft.com/office/powerpoint/2010/main" val="287286824"/>
       </p:ext>
     </p:extLst>
   </p:cSld>
@@ -7863,7 +7816,7 @@
           <p:cNvPr id="2" name="Title 1">
             <a:extLst>
               <a:ext uri="{FF2B5EF4-FFF2-40B4-BE49-F238E27FC236}">
-                <a16:creationId xmlns:a16="http://schemas.microsoft.com/office/drawing/2014/main" id="{7918DD57-685F-9106-A246-52DA83E487AF}"/>
+                <a16:creationId xmlns:a16="http://schemas.microsoft.com/office/drawing/2014/main" id="{45AFEB03-F569-127D-BACE-8B1BE1D1F824}"/>
               </a:ext>
             </a:extLst>
           </p:cNvPr>
@@ -7881,7 +7834,7 @@
           <a:p>
             <a:r>
               <a:rPr lang="en-US" dirty="0"/>
-              <a:t>ARIMA-d Up</a:t>
+              <a:t>With Cross validation</a:t>
             </a:r>
           </a:p>
         </p:txBody>
@@ -7891,7 +7844,7 @@
           <p:cNvPr id="3" name="Content Placeholder 2">
             <a:extLst>
               <a:ext uri="{FF2B5EF4-FFF2-40B4-BE49-F238E27FC236}">
-                <a16:creationId xmlns:a16="http://schemas.microsoft.com/office/drawing/2014/main" id="{5DFC05F1-1780-38C0-3A3E-8D342C5F1611}"/>
+                <a16:creationId xmlns:a16="http://schemas.microsoft.com/office/drawing/2014/main" id="{77CA433B-A410-34D2-CDFF-C59C620D6E66}"/>
               </a:ext>
             </a:extLst>
           </p:cNvPr>
@@ -7904,80 +7857,78 @@
         </p:nvSpPr>
         <p:spPr>
           <a:xfrm>
-            <a:off x="1451579" y="1853753"/>
-            <a:ext cx="9603275" cy="4199727"/>
+            <a:off x="1451579" y="2015733"/>
+            <a:ext cx="9603275" cy="1260868"/>
           </a:xfrm>
         </p:spPr>
         <p:txBody>
-          <a:bodyPr>
-            <a:normAutofit lnSpcReduction="10000"/>
-          </a:bodyPr>
-          <a:lstStyle/>
-          <a:p>
-            <a:r>
-              <a:rPr lang="en-US" dirty="0"/>
-              <a:t>The ARIMA model type is a ‘basic’ one – a more elaborate moving average. </a:t>
-            </a:r>
-          </a:p>
-          <a:p>
-            <a:pPr lvl="1"/>
-            <a:r>
-              <a:rPr lang="en-US" dirty="0"/>
-              <a:t>I.e. it is ‘pure stats’ and is an old way of making these projections. </a:t>
-            </a:r>
-          </a:p>
-          <a:p>
-            <a:r>
-              <a:rPr lang="en-US" dirty="0"/>
-              <a:t>Pros:</a:t>
-            </a:r>
-          </a:p>
-          <a:p>
-            <a:pPr lvl="1"/>
-            <a:r>
-              <a:rPr lang="en-US" dirty="0"/>
-              <a:t>Simple, transparent, generally less overfitting/variance error. </a:t>
-            </a:r>
-          </a:p>
-          <a:p>
-            <a:pPr lvl="1"/>
-            <a:r>
-              <a:rPr lang="en-US" dirty="0"/>
-              <a:t>Single digits of number of weights trained during fitting. </a:t>
-            </a:r>
-          </a:p>
-          <a:p>
-            <a:r>
-              <a:rPr lang="en-US" dirty="0"/>
-              <a:t>Cons:</a:t>
-            </a:r>
-          </a:p>
-          <a:p>
-            <a:pPr lvl="1"/>
-            <a:r>
-              <a:rPr lang="en-US" dirty="0"/>
-              <a:t>Potentially too simple, not adaptable to variable scenarios. </a:t>
-            </a:r>
-          </a:p>
-          <a:p>
-            <a:pPr lvl="1"/>
-            <a:r>
-              <a:rPr lang="en-US" dirty="0"/>
-              <a:t>Low capacity to adapt – too much bias error, especially in complex scenarios. </a:t>
-            </a:r>
-          </a:p>
-          <a:p>
-            <a:r>
-              <a:rPr lang="en-US" dirty="0"/>
-              <a:t>Note – these simpler models with more bias error may perform best, the future is hard to predict accurately. Too much ability of the model to adjust predictions may harm us. </a:t>
-            </a:r>
-          </a:p>
-        </p:txBody>
-      </p:sp>
+          <a:bodyPr/>
+          <a:lstStyle/>
+          <a:p>
+            <a:r>
+              <a:rPr lang="en-US" dirty="0"/>
+              <a:t>With cross validation, we need to do a similar split, but moving over time. </a:t>
+            </a:r>
+          </a:p>
+          <a:p>
+            <a:r>
+              <a:rPr lang="en-US" dirty="0"/>
+              <a:t>If there’s a trend that we haven’t captured, that’ll impact things with drift here. </a:t>
+            </a:r>
+          </a:p>
+        </p:txBody>
+      </p:sp>
+      <p:pic>
+        <p:nvPicPr>
+          <p:cNvPr id="2050" name="Picture 2" descr="Is a random sample a good approach to partition a time series into training  and validation data sets? Why or why not? - Quora">
+            <a:extLst>
+              <a:ext uri="{FF2B5EF4-FFF2-40B4-BE49-F238E27FC236}">
+                <a16:creationId xmlns:a16="http://schemas.microsoft.com/office/drawing/2014/main" id="{8198495F-FBA3-D64D-87DE-8F68AF0241A3}"/>
+              </a:ext>
+            </a:extLst>
+          </p:cNvPr>
+          <p:cNvPicPr>
+            <a:picLocks noChangeAspect="1" noChangeArrowheads="1"/>
+          </p:cNvPicPr>
+          <p:nvPr/>
+        </p:nvPicPr>
+        <p:blipFill>
+          <a:blip r:embed="rId2">
+            <a:extLst>
+              <a:ext uri="{28A0092B-C50C-407E-A947-70E740481C1C}">
+                <a14:useLocalDpi xmlns:a14="http://schemas.microsoft.com/office/drawing/2010/main" val="0"/>
+              </a:ext>
+            </a:extLst>
+          </a:blip>
+          <a:srcRect/>
+          <a:stretch>
+            <a:fillRect/>
+          </a:stretch>
+        </p:blipFill>
+        <p:spPr bwMode="auto">
+          <a:xfrm>
+            <a:off x="2273300" y="3276600"/>
+            <a:ext cx="7645400" cy="3581400"/>
+          </a:xfrm>
+          <a:prstGeom prst="rect">
+            <a:avLst/>
+          </a:prstGeom>
+          <a:noFill/>
+          <a:extLst>
+            <a:ext uri="{909E8E84-426E-40DD-AFC4-6F175D3DCCD1}">
+              <a14:hiddenFill xmlns:a14="http://schemas.microsoft.com/office/drawing/2010/main">
+                <a:solidFill>
+                  <a:srgbClr val="FFFFFF"/>
+                </a:solidFill>
+              </a14:hiddenFill>
+            </a:ext>
+          </a:extLst>
+        </p:spPr>
+      </p:pic>
     </p:spTree>
     <p:extLst>
       <p:ext uri="{BB962C8B-B14F-4D97-AF65-F5344CB8AC3E}">
-        <p14:creationId xmlns:p14="http://schemas.microsoft.com/office/powerpoint/2010/main" val="2830739107"/>
+        <p14:creationId xmlns:p14="http://schemas.microsoft.com/office/powerpoint/2010/main" val="287286824"/>
       </p:ext>
     </p:extLst>
   </p:cSld>
@@ -8009,7 +7960,7 @@
           <p:cNvPr id="2" name="Title 1">
             <a:extLst>
               <a:ext uri="{FF2B5EF4-FFF2-40B4-BE49-F238E27FC236}">
-                <a16:creationId xmlns:a16="http://schemas.microsoft.com/office/drawing/2014/main" id="{DA5678F7-635A-D40C-AD90-AAADEA13E967}"/>
+                <a16:creationId xmlns:a16="http://schemas.microsoft.com/office/drawing/2014/main" id="{7918DD57-685F-9106-A246-52DA83E487AF}"/>
               </a:ext>
             </a:extLst>
           </p:cNvPr>
@@ -8027,7 +7978,7 @@
           <a:p>
             <a:r>
               <a:rPr lang="en-US" dirty="0"/>
-              <a:t>Smarter Time Models</a:t>
+              <a:t>ARIMA-d Up</a:t>
             </a:r>
           </a:p>
         </p:txBody>
@@ -8037,7 +7988,7 @@
           <p:cNvPr id="3" name="Content Placeholder 2">
             <a:extLst>
               <a:ext uri="{FF2B5EF4-FFF2-40B4-BE49-F238E27FC236}">
-                <a16:creationId xmlns:a16="http://schemas.microsoft.com/office/drawing/2014/main" id="{F23B1FF3-C207-9615-B32A-D907854A0D2F}"/>
+                <a16:creationId xmlns:a16="http://schemas.microsoft.com/office/drawing/2014/main" id="{5DFC05F1-1780-38C0-3A3E-8D342C5F1611}"/>
               </a:ext>
             </a:extLst>
           </p:cNvPr>
@@ -8050,84 +8001,80 @@
         </p:nvSpPr>
         <p:spPr>
           <a:xfrm>
-            <a:off x="1137147" y="1853754"/>
-            <a:ext cx="10243158" cy="4199727"/>
+            <a:off x="1451579" y="1853753"/>
+            <a:ext cx="9603275" cy="4199727"/>
           </a:xfrm>
         </p:spPr>
         <p:txBody>
-          <a:bodyPr/>
-          <a:lstStyle/>
-          <a:p>
-            <a:r>
-              <a:rPr lang="en-US" dirty="0"/>
-              <a:t>Modern models have much more capability than a simple ARIMA one. </a:t>
+          <a:bodyPr>
+            <a:normAutofit lnSpcReduction="10000"/>
+          </a:bodyPr>
+          <a:lstStyle/>
+          <a:p>
+            <a:r>
+              <a:rPr lang="en-US" dirty="0"/>
+              <a:t>The ARIMA model type is a ‘basic’ one – a more elaborate moving average. </a:t>
             </a:r>
           </a:p>
           <a:p>
             <a:pPr lvl="1"/>
             <a:r>
               <a:rPr lang="en-US" dirty="0"/>
-              <a:t>Large numbers of weights can capture less frequent or obvious patterns. </a:t>
+              <a:t>I.e. it is ‘pure stats’ and is an old way of making these projections. </a:t>
+            </a:r>
+          </a:p>
+          <a:p>
+            <a:r>
+              <a:rPr lang="en-US" dirty="0"/>
+              <a:t>Pros:</a:t>
             </a:r>
           </a:p>
           <a:p>
             <a:pPr lvl="1"/>
             <a:r>
               <a:rPr lang="en-US" dirty="0"/>
-              <a:t>In some cases (neural networks) models can learn things like the ARIMA patterns themselves. </a:t>
-            </a:r>
-          </a:p>
-          <a:p>
-            <a:r>
-              <a:rPr lang="en-US" dirty="0"/>
-              <a:t>Their capacity to learn is much larger - they have more weights, can learn complex patterns. </a:t>
+              <a:t>Simple, transparent, generally less overfitting/variance error. </a:t>
             </a:r>
           </a:p>
           <a:p>
             <a:pPr lvl="1"/>
             <a:r>
               <a:rPr lang="en-US" dirty="0"/>
-              <a:t>Similar to a large tree (or NN) vs a linear regression – more flexible in learning and adapting. </a:t>
+              <a:t>Single digits of number of weights trained during fitting. </a:t>
+            </a:r>
+          </a:p>
+          <a:p>
+            <a:r>
+              <a:rPr lang="en-US" dirty="0"/>
+              <a:t>Cons:</a:t>
             </a:r>
           </a:p>
           <a:p>
             <a:pPr lvl="1"/>
             <a:r>
               <a:rPr lang="en-US" dirty="0"/>
-              <a:t>Rare events, ‘special’ times like holidays, longer cyclical patterns, </a:t>
-            </a:r>
-            <a:r>
-              <a:rPr lang="en-US" dirty="0" err="1"/>
-              <a:t>etc</a:t>
-            </a:r>
-            <a:r>
-              <a:rPr lang="en-US" dirty="0"/>
-              <a:t>…</a:t>
+              <a:t>Potentially too simple, not adaptable to variable scenarios. </a:t>
             </a:r>
           </a:p>
           <a:p>
             <a:pPr lvl="1"/>
             <a:r>
               <a:rPr lang="en-US" dirty="0"/>
-              <a:t>Much of the flexibility in the tools that helped language models also help here. </a:t>
-            </a:r>
-          </a:p>
-          <a:p>
-            <a:r>
-              <a:rPr lang="en-US" dirty="0"/>
-              <a:t>These models tend to work and interact more similar to what we’re used to (or NN-style). </a:t>
-            </a:r>
-          </a:p>
-          <a:p>
-            <a:pPr lvl="1"/>
-            <a:endParaRPr lang="en-US" dirty="0"/>
+              <a:t>Low capacity to adapt – too much bias error, especially in complex scenarios. </a:t>
+            </a:r>
+          </a:p>
+          <a:p>
+            <a:r>
+              <a:rPr lang="en-US" dirty="0"/>
+              <a:t>Note – these simpler models with more bias error may perform best, the future is hard to predict accurately. Too much ability of the model to adjust predictions may harm us. </a:t>
+            </a:r>
           </a:p>
         </p:txBody>
       </p:sp>
     </p:spTree>
     <p:extLst>
       <p:ext uri="{BB962C8B-B14F-4D97-AF65-F5344CB8AC3E}">
-        <p14:creationId xmlns:p14="http://schemas.microsoft.com/office/powerpoint/2010/main" val="2969086212"/>
+        <p14:creationId xmlns:p14="http://schemas.microsoft.com/office/powerpoint/2010/main" val="2830739107"/>
       </p:ext>
     </p:extLst>
   </p:cSld>
@@ -8159,7 +8106,7 @@
           <p:cNvPr id="2" name="Title 1">
             <a:extLst>
               <a:ext uri="{FF2B5EF4-FFF2-40B4-BE49-F238E27FC236}">
-                <a16:creationId xmlns:a16="http://schemas.microsoft.com/office/drawing/2014/main" id="{19192875-568E-E27F-EF8C-0E63853062C2}"/>
+                <a16:creationId xmlns:a16="http://schemas.microsoft.com/office/drawing/2014/main" id="{DA5678F7-635A-D40C-AD90-AAADEA13E967}"/>
               </a:ext>
             </a:extLst>
           </p:cNvPr>
@@ -8177,7 +8124,7 @@
           <a:p>
             <a:r>
               <a:rPr lang="en-US" dirty="0"/>
-              <a:t>Facebook Prophet</a:t>
+              <a:t>Smarter Time Models</a:t>
             </a:r>
           </a:p>
         </p:txBody>
@@ -8187,7 +8134,7 @@
           <p:cNvPr id="3" name="Content Placeholder 2">
             <a:extLst>
               <a:ext uri="{FF2B5EF4-FFF2-40B4-BE49-F238E27FC236}">
-                <a16:creationId xmlns:a16="http://schemas.microsoft.com/office/drawing/2014/main" id="{BBD86F92-A329-D6B9-24F3-6095A7021DE0}"/>
+                <a16:creationId xmlns:a16="http://schemas.microsoft.com/office/drawing/2014/main" id="{F23B1FF3-C207-9615-B32A-D907854A0D2F}"/>
               </a:ext>
             </a:extLst>
           </p:cNvPr>
@@ -8200,81 +8147,84 @@
         </p:nvSpPr>
         <p:spPr>
           <a:xfrm>
-            <a:off x="1451579" y="2015732"/>
-            <a:ext cx="9603275" cy="4037749"/>
+            <a:off x="1137147" y="1853754"/>
+            <a:ext cx="10243158" cy="4199727"/>
           </a:xfrm>
         </p:spPr>
         <p:txBody>
-          <a:bodyPr>
-            <a:normAutofit lnSpcReduction="10000"/>
-          </a:bodyPr>
-          <a:lstStyle/>
-          <a:p>
-            <a:r>
-              <a:rPr lang="en-US" dirty="0"/>
-              <a:t>Facebook Prophet is a library that is well setup to handle common time-series problems:</a:t>
+          <a:bodyPr/>
+          <a:lstStyle/>
+          <a:p>
+            <a:r>
+              <a:rPr lang="en-US" dirty="0"/>
+              <a:t>Modern models have much more capability than a simple ARIMA one. </a:t>
             </a:r>
           </a:p>
           <a:p>
             <a:pPr lvl="1"/>
             <a:r>
               <a:rPr lang="en-US" dirty="0"/>
-              <a:t>Handles events such as holidays, including custom lists. </a:t>
+              <a:t>Large numbers of weights can capture less frequent or obvious patterns. </a:t>
             </a:r>
           </a:p>
           <a:p>
             <a:pPr lvl="1"/>
             <a:r>
               <a:rPr lang="en-US" dirty="0"/>
-              <a:t>Can be set to anticipate change points, e.g. product launches. </a:t>
+              <a:t>In some cases (neural networks) models can learn things like the ARIMA patterns themselves. </a:t>
+            </a:r>
+          </a:p>
+          <a:p>
+            <a:r>
+              <a:rPr lang="en-US" dirty="0"/>
+              <a:t>Their capacity to learn is much larger - they have more weights, can learn complex patterns. </a:t>
             </a:r>
           </a:p>
           <a:p>
             <a:pPr lvl="1"/>
             <a:r>
               <a:rPr lang="en-US" dirty="0"/>
-              <a:t>Provides useful things like plotting and cross validation. </a:t>
+              <a:t>Similar to a large tree (or NN) vs a linear regression – more flexible in learning and adapting. </a:t>
             </a:r>
           </a:p>
           <a:p>
             <a:pPr lvl="1"/>
             <a:r>
               <a:rPr lang="en-US" dirty="0"/>
-              <a:t>Can handle additional regressors. </a:t>
-            </a:r>
-          </a:p>
-          <a:p>
-            <a:r>
-              <a:rPr lang="en-US" dirty="0"/>
-              <a:t>We can use a Prophet model much like the above models, with slightly different syntax. </a:t>
-            </a:r>
-          </a:p>
-          <a:p>
-            <a:r>
-              <a:rPr lang="en-US" dirty="0"/>
-              <a:t>There are several other libraries that handle time-series data similarly. </a:t>
+              <a:t>Rare events, ‘special’ times like holidays, longer cyclical patterns, </a:t>
+            </a:r>
+            <a:r>
+              <a:rPr lang="en-US" dirty="0" err="1"/>
+              <a:t>etc</a:t>
+            </a:r>
+            <a:r>
+              <a:rPr lang="en-US" dirty="0"/>
+              <a:t>…</a:t>
             </a:r>
           </a:p>
           <a:p>
             <a:pPr lvl="1"/>
             <a:r>
               <a:rPr lang="en-US" dirty="0"/>
-              <a:t>Modern implementations are based on recurrent neural networks (RNNs) or transformer based neural networks. </a:t>
+              <a:t>Much of the flexibility in the tools that helped language models also help here. </a:t>
+            </a:r>
+          </a:p>
+          <a:p>
+            <a:r>
+              <a:rPr lang="en-US" dirty="0"/>
+              <a:t>These models tend to work and interact more similar to what we’re used to (or NN-style). </a:t>
             </a:r>
           </a:p>
           <a:p>
             <a:pPr lvl="1"/>
-            <a:r>
-              <a:rPr lang="en-US" dirty="0"/>
-              <a:t>Neural networks well suited to sequential data. Seen with language models. </a:t>
-            </a:r>
+            <a:endParaRPr lang="en-US" dirty="0"/>
           </a:p>
         </p:txBody>
       </p:sp>
     </p:spTree>
     <p:extLst>
       <p:ext uri="{BB962C8B-B14F-4D97-AF65-F5344CB8AC3E}">
-        <p14:creationId xmlns:p14="http://schemas.microsoft.com/office/powerpoint/2010/main" val="910616763"/>
+        <p14:creationId xmlns:p14="http://schemas.microsoft.com/office/powerpoint/2010/main" val="2969086212"/>
       </p:ext>
     </p:extLst>
   </p:cSld>
@@ -8306,7 +8256,7 @@
           <p:cNvPr id="2" name="Title 1">
             <a:extLst>
               <a:ext uri="{FF2B5EF4-FFF2-40B4-BE49-F238E27FC236}">
-                <a16:creationId xmlns:a16="http://schemas.microsoft.com/office/drawing/2014/main" id="{05D6CAF4-B7BD-3D4A-E7EF-B81C2728AC84}"/>
+                <a16:creationId xmlns:a16="http://schemas.microsoft.com/office/drawing/2014/main" id="{19192875-568E-E27F-EF8C-0E63853062C2}"/>
               </a:ext>
             </a:extLst>
           </p:cNvPr>
@@ -8324,7 +8274,7 @@
           <a:p>
             <a:r>
               <a:rPr lang="en-US" dirty="0"/>
-              <a:t>Prophet Models</a:t>
+              <a:t>Facebook Prophet</a:t>
             </a:r>
           </a:p>
         </p:txBody>
@@ -8334,7 +8284,7 @@
           <p:cNvPr id="3" name="Content Placeholder 2">
             <a:extLst>
               <a:ext uri="{FF2B5EF4-FFF2-40B4-BE49-F238E27FC236}">
-                <a16:creationId xmlns:a16="http://schemas.microsoft.com/office/drawing/2014/main" id="{B9B321EA-9285-DAEB-262C-04F24DE125D0}"/>
+                <a16:creationId xmlns:a16="http://schemas.microsoft.com/office/drawing/2014/main" id="{BBD86F92-A329-D6B9-24F3-6095A7021DE0}"/>
               </a:ext>
             </a:extLst>
           </p:cNvPr>
@@ -8352,66 +8302,68 @@
           </a:xfrm>
         </p:spPr>
         <p:txBody>
-          <a:bodyPr/>
-          <a:lstStyle/>
-          <a:p>
-            <a:r>
-              <a:rPr lang="en-US" dirty="0"/>
-              <a:t>The prophet library makes many of the time series things we may need, easier. </a:t>
-            </a:r>
-          </a:p>
-          <a:p>
-            <a:r>
-              <a:rPr lang="en-US" dirty="0"/>
-              <a:t>Dealing with </a:t>
-            </a:r>
-            <a:r>
-              <a:rPr lang="en-US" dirty="0" err="1"/>
-              <a:t>statationality</a:t>
-            </a:r>
-            <a:r>
-              <a:rPr lang="en-US" dirty="0"/>
-              <a:t> without a bunch of transformations. </a:t>
-            </a:r>
-          </a:p>
-          <a:p>
-            <a:r>
-              <a:rPr lang="en-US" dirty="0"/>
-              <a:t>Accommodating common date-related stuff:</a:t>
+          <a:bodyPr>
+            <a:normAutofit lnSpcReduction="10000"/>
+          </a:bodyPr>
+          <a:lstStyle/>
+          <a:p>
+            <a:r>
+              <a:rPr lang="en-US" dirty="0"/>
+              <a:t>Facebook Prophet is a library that is well setup to handle common time-series problems:</a:t>
             </a:r>
           </a:p>
           <a:p>
             <a:pPr lvl="1"/>
             <a:r>
               <a:rPr lang="en-US" dirty="0"/>
-              <a:t>Days, weeks, months, weekends, etc..</a:t>
-            </a:r>
-          </a:p>
-          <a:p>
-            <a:r>
-              <a:rPr lang="en-US" dirty="0"/>
-              <a:t>Handling common real-life concerns:</a:t>
+              <a:t>Handles events such as holidays, including custom lists. </a:t>
             </a:r>
           </a:p>
           <a:p>
             <a:pPr lvl="1"/>
             <a:r>
               <a:rPr lang="en-US" dirty="0"/>
-              <a:t>Events, holidays, </a:t>
-            </a:r>
-            <a:r>
-              <a:rPr lang="en-US" dirty="0" err="1"/>
-              <a:t>etc</a:t>
-            </a:r>
-            <a:r>
-              <a:rPr lang="en-US" dirty="0"/>
-              <a:t>….</a:t>
-            </a:r>
-          </a:p>
-          <a:p>
-            <a:r>
-              <a:rPr lang="en-US" dirty="0"/>
-              <a:t>Can incorporate additional predictors – expand dimensionality. </a:t>
+              <a:t>Can be set to anticipate change points, e.g. product launches. </a:t>
+            </a:r>
+          </a:p>
+          <a:p>
+            <a:pPr lvl="1"/>
+            <a:r>
+              <a:rPr lang="en-US" dirty="0"/>
+              <a:t>Provides useful things like plotting and cross validation. </a:t>
+            </a:r>
+          </a:p>
+          <a:p>
+            <a:pPr lvl="1"/>
+            <a:r>
+              <a:rPr lang="en-US" dirty="0"/>
+              <a:t>Can handle additional regressors. </a:t>
+            </a:r>
+          </a:p>
+          <a:p>
+            <a:r>
+              <a:rPr lang="en-US" dirty="0"/>
+              <a:t>We can use a Prophet model much like the above models, with slightly different syntax. </a:t>
+            </a:r>
+          </a:p>
+          <a:p>
+            <a:r>
+              <a:rPr lang="en-US" dirty="0"/>
+              <a:t>There are several other libraries that handle time-series data similarly. </a:t>
+            </a:r>
+          </a:p>
+          <a:p>
+            <a:pPr lvl="1"/>
+            <a:r>
+              <a:rPr lang="en-US" dirty="0"/>
+              <a:t>Modern implementations are based on recurrent neural networks (RNNs) or transformer based neural networks. </a:t>
+            </a:r>
+          </a:p>
+          <a:p>
+            <a:pPr lvl="1"/>
+            <a:r>
+              <a:rPr lang="en-US" dirty="0"/>
+              <a:t>Neural networks well suited to sequential data. Seen with language models. </a:t>
             </a:r>
           </a:p>
         </p:txBody>
@@ -8419,7 +8371,7 @@
     </p:spTree>
     <p:extLst>
       <p:ext uri="{BB962C8B-B14F-4D97-AF65-F5344CB8AC3E}">
-        <p14:creationId xmlns:p14="http://schemas.microsoft.com/office/powerpoint/2010/main" val="2883628601"/>
+        <p14:creationId xmlns:p14="http://schemas.microsoft.com/office/powerpoint/2010/main" val="910616763"/>
       </p:ext>
     </p:extLst>
   </p:cSld>
@@ -8451,6 +8403,151 @@
           <p:cNvPr id="2" name="Title 1">
             <a:extLst>
               <a:ext uri="{FF2B5EF4-FFF2-40B4-BE49-F238E27FC236}">
+                <a16:creationId xmlns:a16="http://schemas.microsoft.com/office/drawing/2014/main" id="{05D6CAF4-B7BD-3D4A-E7EF-B81C2728AC84}"/>
+              </a:ext>
+            </a:extLst>
+          </p:cNvPr>
+          <p:cNvSpPr>
+            <a:spLocks noGrp="1"/>
+          </p:cNvSpPr>
+          <p:nvPr>
+            <p:ph type="title"/>
+          </p:nvPr>
+        </p:nvSpPr>
+        <p:spPr/>
+        <p:txBody>
+          <a:bodyPr/>
+          <a:lstStyle/>
+          <a:p>
+            <a:r>
+              <a:rPr lang="en-US" dirty="0"/>
+              <a:t>Prophet Models</a:t>
+            </a:r>
+          </a:p>
+        </p:txBody>
+      </p:sp>
+      <p:sp>
+        <p:nvSpPr>
+          <p:cNvPr id="3" name="Content Placeholder 2">
+            <a:extLst>
+              <a:ext uri="{FF2B5EF4-FFF2-40B4-BE49-F238E27FC236}">
+                <a16:creationId xmlns:a16="http://schemas.microsoft.com/office/drawing/2014/main" id="{B9B321EA-9285-DAEB-262C-04F24DE125D0}"/>
+              </a:ext>
+            </a:extLst>
+          </p:cNvPr>
+          <p:cNvSpPr>
+            <a:spLocks noGrp="1"/>
+          </p:cNvSpPr>
+          <p:nvPr>
+            <p:ph idx="1"/>
+          </p:nvPr>
+        </p:nvSpPr>
+        <p:spPr>
+          <a:xfrm>
+            <a:off x="1451579" y="2015732"/>
+            <a:ext cx="9603275" cy="4037749"/>
+          </a:xfrm>
+        </p:spPr>
+        <p:txBody>
+          <a:bodyPr/>
+          <a:lstStyle/>
+          <a:p>
+            <a:r>
+              <a:rPr lang="en-US" dirty="0"/>
+              <a:t>The prophet library makes many of the time series things we may need, easier. </a:t>
+            </a:r>
+          </a:p>
+          <a:p>
+            <a:r>
+              <a:rPr lang="en-US" dirty="0"/>
+              <a:t>Dealing with </a:t>
+            </a:r>
+            <a:r>
+              <a:rPr lang="en-US" dirty="0" err="1"/>
+              <a:t>statationality</a:t>
+            </a:r>
+            <a:r>
+              <a:rPr lang="en-US" dirty="0"/>
+              <a:t> without a bunch of transformations. </a:t>
+            </a:r>
+          </a:p>
+          <a:p>
+            <a:r>
+              <a:rPr lang="en-US" dirty="0"/>
+              <a:t>Accommodating common date-related stuff:</a:t>
+            </a:r>
+          </a:p>
+          <a:p>
+            <a:pPr lvl="1"/>
+            <a:r>
+              <a:rPr lang="en-US" dirty="0"/>
+              <a:t>Days, weeks, months, weekends, etc..</a:t>
+            </a:r>
+          </a:p>
+          <a:p>
+            <a:r>
+              <a:rPr lang="en-US" dirty="0"/>
+              <a:t>Handling common real-life concerns:</a:t>
+            </a:r>
+          </a:p>
+          <a:p>
+            <a:pPr lvl="1"/>
+            <a:r>
+              <a:rPr lang="en-US" dirty="0"/>
+              <a:t>Events, holidays, </a:t>
+            </a:r>
+            <a:r>
+              <a:rPr lang="en-US" dirty="0" err="1"/>
+              <a:t>etc</a:t>
+            </a:r>
+            <a:r>
+              <a:rPr lang="en-US" dirty="0"/>
+              <a:t>….</a:t>
+            </a:r>
+          </a:p>
+          <a:p>
+            <a:r>
+              <a:rPr lang="en-US" dirty="0"/>
+              <a:t>Can incorporate additional predictors – expand dimensionality. </a:t>
+            </a:r>
+          </a:p>
+        </p:txBody>
+      </p:sp>
+    </p:spTree>
+    <p:extLst>
+      <p:ext uri="{BB962C8B-B14F-4D97-AF65-F5344CB8AC3E}">
+        <p14:creationId xmlns:p14="http://schemas.microsoft.com/office/powerpoint/2010/main" val="2883628601"/>
+      </p:ext>
+    </p:extLst>
+  </p:cSld>
+  <p:clrMapOvr>
+    <a:masterClrMapping/>
+  </p:clrMapOvr>
+</p:sld>
+</file>
+
+<file path=ppt/slides/slide38.xml><?xml version="1.0" encoding="utf-8"?>
+<p:sld xmlns:a="http://schemas.openxmlformats.org/drawingml/2006/main" xmlns:r="http://schemas.openxmlformats.org/officeDocument/2006/relationships" xmlns:p="http://schemas.openxmlformats.org/presentationml/2006/main">
+  <p:cSld>
+    <p:spTree>
+      <p:nvGrpSpPr>
+        <p:cNvPr id="1" name=""/>
+        <p:cNvGrpSpPr/>
+        <p:nvPr/>
+      </p:nvGrpSpPr>
+      <p:grpSpPr>
+        <a:xfrm>
+          <a:off x="0" y="0"/>
+          <a:ext cx="0" cy="0"/>
+          <a:chOff x="0" y="0"/>
+          <a:chExt cx="0" cy="0"/>
+        </a:xfrm>
+      </p:grpSpPr>
+      <p:sp>
+        <p:nvSpPr>
+          <p:cNvPr id="2" name="Title 1">
+            <a:extLst>
+              <a:ext uri="{FF2B5EF4-FFF2-40B4-BE49-F238E27FC236}">
                 <a16:creationId xmlns:a16="http://schemas.microsoft.com/office/drawing/2014/main" id="{44FF2E50-6EDB-B2D2-D936-C7FAD2E53B07}"/>
               </a:ext>
             </a:extLst>
@@ -8559,7 +8656,7 @@
 </p:sld>
 </file>
 
-<file path=ppt/slides/slide38.xml><?xml version="1.0" encoding="utf-8"?>
+<file path=ppt/slides/slide39.xml><?xml version="1.0" encoding="utf-8"?>
 <p:sld xmlns:a="http://schemas.openxmlformats.org/drawingml/2006/main" xmlns:r="http://schemas.openxmlformats.org/officeDocument/2006/relationships" xmlns:p="http://schemas.openxmlformats.org/presentationml/2006/main">
   <p:cSld>
     <p:spTree>
@@ -9168,156 +9265,8 @@
 </p:sld>
 </file>
 
-<file path=ppt/slides/slide39.xml><?xml version="1.0" encoding="utf-8"?>
-<p:sld xmlns:a="http://schemas.openxmlformats.org/drawingml/2006/main" xmlns:r="http://schemas.openxmlformats.org/officeDocument/2006/relationships" xmlns:p="http://schemas.openxmlformats.org/presentationml/2006/main">
-  <p:cSld>
-    <p:spTree>
-      <p:nvGrpSpPr>
-        <p:cNvPr id="1" name=""/>
-        <p:cNvGrpSpPr/>
-        <p:nvPr/>
-      </p:nvGrpSpPr>
-      <p:grpSpPr>
-        <a:xfrm>
-          <a:off x="0" y="0"/>
-          <a:ext cx="0" cy="0"/>
-          <a:chOff x="0" y="0"/>
-          <a:chExt cx="0" cy="0"/>
-        </a:xfrm>
-      </p:grpSpPr>
-      <p:sp>
-        <p:nvSpPr>
-          <p:cNvPr id="2" name="Title 1">
-            <a:extLst>
-              <a:ext uri="{FF2B5EF4-FFF2-40B4-BE49-F238E27FC236}">
-                <a16:creationId xmlns:a16="http://schemas.microsoft.com/office/drawing/2014/main" id="{B8192152-25FD-3B93-1014-91BD46D3B2FF}"/>
-              </a:ext>
-            </a:extLst>
-          </p:cNvPr>
-          <p:cNvSpPr>
-            <a:spLocks noGrp="1"/>
-          </p:cNvSpPr>
-          <p:nvPr>
-            <p:ph type="title"/>
-          </p:nvPr>
-        </p:nvSpPr>
-        <p:spPr/>
-        <p:txBody>
-          <a:bodyPr/>
-          <a:lstStyle/>
-          <a:p>
-            <a:r>
-              <a:rPr lang="en-US" dirty="0"/>
-              <a:t>Other Considerations</a:t>
-            </a:r>
-          </a:p>
-        </p:txBody>
-      </p:sp>
-      <p:sp>
-        <p:nvSpPr>
-          <p:cNvPr id="3" name="Content Placeholder 2">
-            <a:extLst>
-              <a:ext uri="{FF2B5EF4-FFF2-40B4-BE49-F238E27FC236}">
-                <a16:creationId xmlns:a16="http://schemas.microsoft.com/office/drawing/2014/main" id="{D2D9FF42-655F-EB33-930F-0C71AFC5EB29}"/>
-              </a:ext>
-            </a:extLst>
-          </p:cNvPr>
-          <p:cNvSpPr>
-            <a:spLocks noGrp="1"/>
-          </p:cNvSpPr>
-          <p:nvPr>
-            <p:ph idx="1"/>
-          </p:nvPr>
-        </p:nvSpPr>
-        <p:spPr>
-          <a:xfrm>
-            <a:off x="388419" y="2015732"/>
-            <a:ext cx="4887588" cy="4037749"/>
-          </a:xfrm>
-        </p:spPr>
-        <p:txBody>
-          <a:bodyPr/>
-          <a:lstStyle/>
-          <a:p>
-            <a:r>
-              <a:rPr lang="en-US" dirty="0"/>
-              <a:t>Advanced models can also handle one-off events, like COVID. </a:t>
-            </a:r>
-          </a:p>
-          <a:p>
-            <a:r>
-              <a:rPr lang="en-US" dirty="0"/>
-              <a:t>The prophet API is generally setup to make this mostly pretty simple. </a:t>
-            </a:r>
-          </a:p>
-          <a:p>
-            <a:r>
-              <a:rPr lang="en-US" dirty="0"/>
-              <a:t>There are a bunch of similar options, mostly in a user-friendly setup. </a:t>
-            </a:r>
-          </a:p>
-          <a:p>
-            <a:pPr lvl="1"/>
-            <a:r>
-              <a:rPr lang="en-US" dirty="0"/>
-              <a:t>Events, weekends, </a:t>
-            </a:r>
-            <a:r>
-              <a:rPr lang="en-US" dirty="0" err="1"/>
-              <a:t>etc</a:t>
-            </a:r>
-            <a:r>
-              <a:rPr lang="en-US" dirty="0"/>
-              <a:t>…</a:t>
-            </a:r>
-          </a:p>
-        </p:txBody>
-      </p:sp>
-      <p:pic>
-        <p:nvPicPr>
-          <p:cNvPr id="4" name="Picture 3">
-            <a:extLst>
-              <a:ext uri="{FF2B5EF4-FFF2-40B4-BE49-F238E27FC236}">
-                <a16:creationId xmlns:a16="http://schemas.microsoft.com/office/drawing/2014/main" id="{68A6968E-65C5-381D-B43F-886611A0193D}"/>
-              </a:ext>
-            </a:extLst>
-          </p:cNvPr>
-          <p:cNvPicPr>
-            <a:picLocks noChangeAspect="1"/>
-          </p:cNvPicPr>
-          <p:nvPr/>
-        </p:nvPicPr>
-        <p:blipFill>
-          <a:blip r:embed="rId2"/>
-          <a:stretch>
-            <a:fillRect/>
-          </a:stretch>
-        </p:blipFill>
-        <p:spPr>
-          <a:xfrm>
-            <a:off x="5276006" y="1293408"/>
-            <a:ext cx="6915993" cy="5564592"/>
-          </a:xfrm>
-          <a:prstGeom prst="rect">
-            <a:avLst/>
-          </a:prstGeom>
-        </p:spPr>
-      </p:pic>
-    </p:spTree>
-    <p:extLst>
-      <p:ext uri="{BB962C8B-B14F-4D97-AF65-F5344CB8AC3E}">
-        <p14:creationId xmlns:p14="http://schemas.microsoft.com/office/powerpoint/2010/main" val="535332483"/>
-      </p:ext>
-    </p:extLst>
-  </p:cSld>
-  <p:clrMapOvr>
-    <a:masterClrMapping/>
-  </p:clrMapOvr>
-</p:sld>
-</file>
-
 <file path=ppt/slides/slide4.xml><?xml version="1.0" encoding="utf-8"?>
-<p:sld xmlns:a="http://schemas.openxmlformats.org/drawingml/2006/main" xmlns:r="http://schemas.openxmlformats.org/officeDocument/2006/relationships" xmlns:p="http://schemas.openxmlformats.org/presentationml/2006/main">
+<p:sld xmlns:a="http://schemas.openxmlformats.org/drawingml/2006/main" xmlns:r="http://schemas.openxmlformats.org/officeDocument/2006/relationships" xmlns:p="http://schemas.openxmlformats.org/presentationml/2006/main" show="0">
   <p:cSld>
     <p:spTree>
       <p:nvGrpSpPr>
@@ -9473,6 +9422,154 @@
           <p:cNvPr id="2" name="Title 1">
             <a:extLst>
               <a:ext uri="{FF2B5EF4-FFF2-40B4-BE49-F238E27FC236}">
+                <a16:creationId xmlns:a16="http://schemas.microsoft.com/office/drawing/2014/main" id="{B8192152-25FD-3B93-1014-91BD46D3B2FF}"/>
+              </a:ext>
+            </a:extLst>
+          </p:cNvPr>
+          <p:cNvSpPr>
+            <a:spLocks noGrp="1"/>
+          </p:cNvSpPr>
+          <p:nvPr>
+            <p:ph type="title"/>
+          </p:nvPr>
+        </p:nvSpPr>
+        <p:spPr/>
+        <p:txBody>
+          <a:bodyPr/>
+          <a:lstStyle/>
+          <a:p>
+            <a:r>
+              <a:rPr lang="en-US" dirty="0"/>
+              <a:t>Other Considerations</a:t>
+            </a:r>
+          </a:p>
+        </p:txBody>
+      </p:sp>
+      <p:sp>
+        <p:nvSpPr>
+          <p:cNvPr id="3" name="Content Placeholder 2">
+            <a:extLst>
+              <a:ext uri="{FF2B5EF4-FFF2-40B4-BE49-F238E27FC236}">
+                <a16:creationId xmlns:a16="http://schemas.microsoft.com/office/drawing/2014/main" id="{D2D9FF42-655F-EB33-930F-0C71AFC5EB29}"/>
+              </a:ext>
+            </a:extLst>
+          </p:cNvPr>
+          <p:cNvSpPr>
+            <a:spLocks noGrp="1"/>
+          </p:cNvSpPr>
+          <p:nvPr>
+            <p:ph idx="1"/>
+          </p:nvPr>
+        </p:nvSpPr>
+        <p:spPr>
+          <a:xfrm>
+            <a:off x="388419" y="2015732"/>
+            <a:ext cx="4887588" cy="4037749"/>
+          </a:xfrm>
+        </p:spPr>
+        <p:txBody>
+          <a:bodyPr/>
+          <a:lstStyle/>
+          <a:p>
+            <a:r>
+              <a:rPr lang="en-US" dirty="0"/>
+              <a:t>Advanced models can also handle one-off events, like COVID. </a:t>
+            </a:r>
+          </a:p>
+          <a:p>
+            <a:r>
+              <a:rPr lang="en-US" dirty="0"/>
+              <a:t>The prophet API is generally setup to make this mostly pretty simple. </a:t>
+            </a:r>
+          </a:p>
+          <a:p>
+            <a:r>
+              <a:rPr lang="en-US" dirty="0"/>
+              <a:t>There are a bunch of similar options, mostly in a user-friendly setup. </a:t>
+            </a:r>
+          </a:p>
+          <a:p>
+            <a:pPr lvl="1"/>
+            <a:r>
+              <a:rPr lang="en-US" dirty="0"/>
+              <a:t>Events, weekends, </a:t>
+            </a:r>
+            <a:r>
+              <a:rPr lang="en-US" dirty="0" err="1"/>
+              <a:t>etc</a:t>
+            </a:r>
+            <a:r>
+              <a:rPr lang="en-US" dirty="0"/>
+              <a:t>…</a:t>
+            </a:r>
+          </a:p>
+        </p:txBody>
+      </p:sp>
+      <p:pic>
+        <p:nvPicPr>
+          <p:cNvPr id="4" name="Picture 3">
+            <a:extLst>
+              <a:ext uri="{FF2B5EF4-FFF2-40B4-BE49-F238E27FC236}">
+                <a16:creationId xmlns:a16="http://schemas.microsoft.com/office/drawing/2014/main" id="{68A6968E-65C5-381D-B43F-886611A0193D}"/>
+              </a:ext>
+            </a:extLst>
+          </p:cNvPr>
+          <p:cNvPicPr>
+            <a:picLocks noChangeAspect="1"/>
+          </p:cNvPicPr>
+          <p:nvPr/>
+        </p:nvPicPr>
+        <p:blipFill>
+          <a:blip r:embed="rId2"/>
+          <a:stretch>
+            <a:fillRect/>
+          </a:stretch>
+        </p:blipFill>
+        <p:spPr>
+          <a:xfrm>
+            <a:off x="5276006" y="1293408"/>
+            <a:ext cx="6915993" cy="5564592"/>
+          </a:xfrm>
+          <a:prstGeom prst="rect">
+            <a:avLst/>
+          </a:prstGeom>
+        </p:spPr>
+      </p:pic>
+    </p:spTree>
+    <p:extLst>
+      <p:ext uri="{BB962C8B-B14F-4D97-AF65-F5344CB8AC3E}">
+        <p14:creationId xmlns:p14="http://schemas.microsoft.com/office/powerpoint/2010/main" val="535332483"/>
+      </p:ext>
+    </p:extLst>
+  </p:cSld>
+  <p:clrMapOvr>
+    <a:masterClrMapping/>
+  </p:clrMapOvr>
+</p:sld>
+</file>
+
+<file path=ppt/slides/slide41.xml><?xml version="1.0" encoding="utf-8"?>
+<p:sld xmlns:a="http://schemas.openxmlformats.org/drawingml/2006/main" xmlns:r="http://schemas.openxmlformats.org/officeDocument/2006/relationships" xmlns:p="http://schemas.openxmlformats.org/presentationml/2006/main">
+  <p:cSld>
+    <p:spTree>
+      <p:nvGrpSpPr>
+        <p:cNvPr id="1" name=""/>
+        <p:cNvGrpSpPr/>
+        <p:nvPr/>
+      </p:nvGrpSpPr>
+      <p:grpSpPr>
+        <a:xfrm>
+          <a:off x="0" y="0"/>
+          <a:ext cx="0" cy="0"/>
+          <a:chOff x="0" y="0"/>
+          <a:chExt cx="0" cy="0"/>
+        </a:xfrm>
+      </p:grpSpPr>
+      <p:sp>
+        <p:nvSpPr>
+          <p:cNvPr id="2" name="Title 1">
+            <a:extLst>
+              <a:ext uri="{FF2B5EF4-FFF2-40B4-BE49-F238E27FC236}">
                 <a16:creationId xmlns:a16="http://schemas.microsoft.com/office/drawing/2014/main" id="{8AF700E2-E516-8380-3E0A-1F6BA99D292A}"/>
               </a:ext>
             </a:extLst>
@@ -9608,7 +9705,7 @@
 </p:sld>
 </file>
 
-<file path=ppt/slides/slide41.xml><?xml version="1.0" encoding="utf-8"?>
+<file path=ppt/slides/slide42.xml><?xml version="1.0" encoding="utf-8"?>
 <p:sld xmlns:a="http://schemas.openxmlformats.org/drawingml/2006/main" xmlns:r="http://schemas.openxmlformats.org/officeDocument/2006/relationships" xmlns:p="http://schemas.openxmlformats.org/presentationml/2006/main">
   <p:cSld>
     <p:spTree>
@@ -10242,7 +10339,7 @@
 </file>
 
 <file path=ppt/slides/slide9.xml><?xml version="1.0" encoding="utf-8"?>
-<p:sld xmlns:a="http://schemas.openxmlformats.org/drawingml/2006/main" xmlns:r="http://schemas.openxmlformats.org/officeDocument/2006/relationships" xmlns:p="http://schemas.openxmlformats.org/presentationml/2006/main" show="0">
+<p:sld xmlns:a="http://schemas.openxmlformats.org/drawingml/2006/main" xmlns:r="http://schemas.openxmlformats.org/officeDocument/2006/relationships" xmlns:p="http://schemas.openxmlformats.org/presentationml/2006/main">
   <p:cSld>
     <p:spTree>
       <p:nvGrpSpPr>
